--- a/docs/TTB_Executive_Presentation.pptx
+++ b/docs/TTB_Executive_Presentation.pptx
@@ -3008,7 +3008,7 @@
                 <a:ea typeface="Calibri" pitchFamily="34" charset="-122"/>
                 <a:cs typeface="Calibri" pitchFamily="34" charset="-120"/>
               </a:rPr>
-              <a:t>Mode: </a:t>
+              <a:t>Mode: Modal Qwen v2 (PII fields) + Haiku (public text) hybrid</a:t>
             </a:r>
             <a:pPr indent="0" marL="0">
               <a:spcAft>
@@ -3025,7 +3025,7 @@
                 <a:ea typeface="Calibri" pitchFamily="34" charset="-122"/>
                 <a:cs typeface="Calibri" pitchFamily="34" charset="-120"/>
               </a:rPr>
-              <a:t>Anthropic Haiku (cloud)</a:t>
+              <a:t/>
             </a:r>
             <a:endParaRPr lang="en-US" sz="1300" dirty="0"/>
           </a:p>
@@ -3045,7 +3045,7 @@
                 <a:ea typeface="Calibri" pitchFamily="34" charset="-122"/>
                 <a:cs typeface="Calibri" pitchFamily="34" charset="-120"/>
               </a:rPr>
-              <a:t>Latency: </a:t>
+              <a:t>Latency: ~5 s warm · ~9 s cold-start fallback to Haiku</a:t>
             </a:r>
             <a:pPr indent="0" marL="0">
               <a:spcAft>
@@ -3062,7 +3062,7 @@
                 <a:ea typeface="Calibri" pitchFamily="34" charset="-122"/>
                 <a:cs typeface="Calibri" pitchFamily="34" charset="-120"/>
               </a:rPr>
-              <a:t>5–7 s warm</a:t>
+              <a:t/>
             </a:r>
             <a:endParaRPr lang="en-US" sz="1300" dirty="0"/>
           </a:p>
@@ -13517,7 +13517,7 @@
                 <a:ea typeface="Georgia" pitchFamily="34" charset="-122"/>
                 <a:cs typeface="Georgia" pitchFamily="34" charset="-120"/>
               </a:rPr>
-              <a:t>Same code · different boundary</a:t>
+              <a:t>Same code · privacy boundary on PII</a:t>
             </a:r>
             <a:endParaRPr lang="en-US" sz="3200" dirty="0"/>
           </a:p>
@@ -13818,7 +13818,7 @@
                 <a:ea typeface="Georgia" pitchFamily="34" charset="-122"/>
                 <a:cs typeface="Georgia" pitchFamily="34" charset="-120"/>
               </a:rPr>
-              <a:t>Public</a:t>
+              <a:t>Privacy-focused hybrid</a:t>
             </a:r>
             <a:endParaRPr lang="en-US" sz="2200" dirty="0"/>
           </a:p>
@@ -13857,7 +13857,7 @@
                 <a:ea typeface="Calibri" pitchFamily="34" charset="-122"/>
                 <a:cs typeface="Calibri" pitchFamily="34" charset="-120"/>
               </a:rPr>
-              <a:t>Vercel + Haiku — currently live</a:t>
+              <a:t>Vercel + Modal Qwen v2 + Haiku — currently live</a:t>
             </a:r>
             <a:endParaRPr lang="en-US" sz="1100" dirty="0"/>
           </a:p>
@@ -13896,7 +13896,7 @@
                 <a:ea typeface="Calibri" pitchFamily="34" charset="-122"/>
                 <a:cs typeface="Calibri" pitchFamily="34" charset="-120"/>
               </a:rPr>
-              <a:t>React on Vercel CDN. FastAPI as a serverless function. Vision extraction via Anthropic API. Privacy posture: label images traverse Anthropic at inference time.</a:t>
+              <a:t>React on Vercel CDN. Modal Qwen v2 LoRA on a container WE control reads the 4 PII fields (brand, class, bottler, country). Anthropic Haiku reads the 27 CFR 16.21 verbatim warning text + ABV + net contents — all public-text values with no privacy classification. Label images traverse Modal (our boundary) and Haiku (public-text only).</a:t>
             </a:r>
             <a:endParaRPr lang="en-US" sz="1200" dirty="0"/>
           </a:p>
@@ -14077,7 +14077,7 @@
                 <a:ea typeface="Calibri" pitchFamily="34" charset="-122"/>
                 <a:cs typeface="Calibri" pitchFamily="34" charset="-120"/>
               </a:rPr>
-              <a:t>Cloud · external API</a:t>
+              <a:t>Modal boundary on PII · Haiku for 27 CFR public text only</a:t>
             </a:r>
             <a:endParaRPr lang="en-US" sz="1100" dirty="0"/>
           </a:p>
@@ -14236,7 +14236,7 @@
                 <a:ea typeface="Georgia" pitchFamily="34" charset="-122"/>
                 <a:cs typeface="Georgia" pitchFamily="34" charset="-120"/>
               </a:rPr>
-              <a:t>Privacy-first</a:t>
+              <a:t>Privacy-only (no commodity model)</a:t>
             </a:r>
             <a:endParaRPr lang="en-US" sz="2200" dirty="0"/>
           </a:p>
@@ -14275,7 +14275,7 @@
                 <a:ea typeface="Calibri" pitchFamily="34" charset="-122"/>
                 <a:cs typeface="Calibri" pitchFamily="34" charset="-120"/>
               </a:rPr>
-              <a:t>Modal · Cerebrium · RunPod</a:t>
+              <a:t>Modal Qwen v2 only · Tesseract for warning</a:t>
             </a:r>
             <a:endParaRPr lang="en-US" sz="1100" dirty="0"/>
           </a:p>
@@ -14314,7 +14314,7 @@
                 <a:ea typeface="Calibri" pitchFamily="34" charset="-122"/>
                 <a:cs typeface="Calibri" pitchFamily="34" charset="-120"/>
               </a:rPr>
-              <a:t>Same React + FastAPI. Vision extraction via Qwen v2 LoRA on container-served GPU. No external API. Scale-to-zero. Validated separately on 200-row holdout.</a:t>
+              <a:t>Same React + FastAPI. Modal Qwen v2 + Modal Tesseract container handle every field — Haiku is removed entirely. Government Warning verbatim falls back to Tesseract regex. Use when no third-party API is acceptable in the data path.</a:t>
             </a:r>
             <a:endParaRPr lang="en-US" sz="1200" dirty="0"/>
           </a:p>
@@ -14495,7 +14495,7 @@
                 <a:ea typeface="Calibri" pitchFamily="34" charset="-122"/>
                 <a:cs typeface="Calibri" pitchFamily="34" charset="-120"/>
               </a:rPr>
-              <a:t>Single provider · auditable</a:t>
+              <a:t>Zero third-party API · single provider</a:t>
             </a:r>
             <a:endParaRPr lang="en-US" sz="1100" dirty="0"/>
           </a:p>

--- a/docs/TTB_Executive_Presentation.pptx
+++ b/docs/TTB_Executive_Presentation.pptx
@@ -10472,7 +10472,7 @@
                 <a:ea typeface="Georgia" pitchFamily="34" charset="-122"/>
                 <a:cs typeface="Georgia" pitchFamily="34" charset="-120"/>
               </a:rPr>
-              <a:t>Qwen v2 LoRA — 2.1× Haiku on the 4 trained fields</a:t>
+              <a:t>Qwen v2 LoRA · 77.5% on the 4 trained fields (2000-row holdout)</a:t>
             </a:r>
             <a:endParaRPr lang="en-US" sz="3200" dirty="0"/>
           </a:p>
@@ -10589,7 +10589,7 @@
                 <a:ea typeface="Georgia" pitchFamily="34" charset="-122"/>
                 <a:cs typeface="Georgia" pitchFamily="34" charset="-120"/>
               </a:rPr>
-              <a:t>78.0%</a:t>
+              <a:t>77.5%</a:t>
             </a:r>
             <a:endParaRPr lang="en-US" sz="13000" dirty="0"/>
           </a:p>
@@ -10784,7 +10784,7 @@
                 <a:ea typeface="Calibri" pitchFamily="34" charset="-122"/>
                 <a:cs typeface="Calibri" pitchFamily="34" charset="-120"/>
               </a:rPr>
-              <a:t>200-row TTB-stratified holdout · spirits / wine / beer-malt</a:t>
+              <a:t>2000-row TTB-stratified holdout · 1028 wine / 689 spirits / 283 malt · seed 42</a:t>
             </a:r>
             <a:endParaRPr lang="en-US" sz="1000" dirty="0"/>
           </a:p>
@@ -10839,7 +10839,7 @@
                 <a:ea typeface="Georgia" pitchFamily="34" charset="-122"/>
                 <a:cs typeface="Georgia" pitchFamily="34" charset="-120"/>
               </a:rPr>
-              <a:t>Largest delta: +72.0pp on Class &amp; type — TTB's vocabulary ("SPANISH GRAPE BRANDY FB") is invisible to Haiku zero-shot but learned cleanly by the LoRA.</a:t>
+              <a:t>Validates within noise of the original 200-row eval (78.0% → 77.5%). v2 generalises — it isn't overfit to whichever subset we initially sampled. Haiku zero-shot held at 37.2% on the 200-row eval; we ran v1 + v2 on 2K but didn't re-spend Haiku quota at scale.</a:t>
             </a:r>
             <a:endParaRPr lang="en-US" sz="1100" dirty="0"/>
           </a:p>
@@ -10974,7 +10974,7 @@
                 <a:ea typeface="Georgia" pitchFamily="34" charset="-122"/>
                 <a:cs typeface="Georgia" pitchFamily="34" charset="-120"/>
               </a:rPr>
-              <a:t>Better data + narrower schema → 38% → 78%</a:t>
+              <a:t>Better data + narrower schema → 1.9% → 77.5% on the 2K holdout</a:t>
             </a:r>
             <a:endParaRPr lang="en-US" sz="3200" dirty="0"/>
           </a:p>
@@ -11393,7 +11393,7 @@
                 <a:ea typeface="Calibri" pitchFamily="34" charset="-122"/>
                 <a:cs typeface="Calibri" pitchFamily="34" charset="-120"/>
               </a:rPr>
-              <a:t>Result: </a:t>
+              <a:t>Result: 38.4% micro on COLA Cloud labels (in-distribution) · 1.9% on the 2K TTB-Registry holdout (out-of-distribution — v1 never saw Registry images)</a:t>
             </a:r>
             <a:pPr indent="0" marL="0">
               <a:spcAft>
@@ -11410,7 +11410,7 @@
                 <a:ea typeface="Calibri" pitchFamily="34" charset="-122"/>
                 <a:cs typeface="Calibri" pitchFamily="34" charset="-120"/>
               </a:rPr>
-              <a:t>38.4% micro · hallucinated long warning text · 23% on Class &amp; type</a:t>
+              <a:t/>
             </a:r>
             <a:endParaRPr lang="en-US" sz="1200" dirty="0"/>
           </a:p>
@@ -11758,7 +11758,7 @@
                 <a:ea typeface="Calibri" pitchFamily="34" charset="-122"/>
                 <a:cs typeface="Calibri" pitchFamily="34" charset="-120"/>
               </a:rPr>
-              <a:t>Result: </a:t>
+              <a:t>Result: 78.0% on the 200-row release eval · 77.5% on the 2000-row holdout — within noise · zero hallucination · 88.5% on Class &amp; type</a:t>
             </a:r>
             <a:pPr indent="0" marL="0">
               <a:spcAft>
@@ -11775,7 +11775,7 @@
                 <a:ea typeface="Calibri" pitchFamily="34" charset="-122"/>
                 <a:cs typeface="Calibri" pitchFamily="34" charset="-120"/>
               </a:rPr>
-              <a:t>78.0% micro · zero hallucination · 91.5% on Class &amp; type</a:t>
+              <a:t/>
             </a:r>
             <a:endParaRPr lang="en-US" sz="1200" dirty="0"/>
           </a:p>
@@ -11877,7 +11877,7 @@
                 <a:ea typeface="Calibri" pitchFamily="34" charset="-122"/>
                 <a:cs typeface="Calibri" pitchFamily="34" charset="-120"/>
               </a:rPr>
-              <a:t>Volume matters: </a:t>
+              <a:t>Volume matters: 6.5× more data + 50% more epochs explains the bulk of the gain. Schema discipline matters: narrowing to fields with clean ground truth eliminated v1's warning-text hallucination — engine handles that deterministically. And the 2K out-of-distribution collapse from 38% → 1.9% proves the v1 number was specific to its training corpus, not a general capability.</a:t>
             </a:r>
             <a:pPr indent="0" marL="0">
               <a:buNone/>
@@ -11891,7 +11891,7 @@
                 <a:ea typeface="Calibri" pitchFamily="34" charset="-122"/>
                 <a:cs typeface="Calibri" pitchFamily="34" charset="-120"/>
               </a:rPr>
-              <a:t>6.5× more data + 50% more epochs explains the bulk of the gain. </a:t>
+              <a:t/>
             </a:r>
             <a:pPr indent="0" marL="0">
               <a:buNone/>
@@ -11905,7 +11905,7 @@
                 <a:ea typeface="Calibri" pitchFamily="34" charset="-122"/>
                 <a:cs typeface="Calibri" pitchFamily="34" charset="-120"/>
               </a:rPr>
-              <a:t>Schema discipline matters: </a:t>
+              <a:t/>
             </a:r>
             <a:pPr indent="0" marL="0">
               <a:buNone/>
@@ -11919,7 +11919,7 @@
                 <a:ea typeface="Calibri" pitchFamily="34" charset="-122"/>
                 <a:cs typeface="Calibri" pitchFamily="34" charset="-120"/>
               </a:rPr>
-              <a:t>narrowing to fields with clean ground truth eliminated v1's warning-text hallucination — the engine handles that field deterministically instead.</a:t>
+              <a:t/>
             </a:r>
             <a:endParaRPr lang="en-US" sz="1100" dirty="0"/>
           </a:p>

--- a/docs/TTB_Executive_Presentation.pptx
+++ b/docs/TTB_Executive_Presentation.pptx
@@ -9,6 +9,7 @@
     <p:sldId id="257" r:id="rId3"/>
     <p:sldId id="258" r:id="rId4"/>
     <p:sldId id="259" r:id="rId5"/>
+    <p:sldId id="268" r:id="rId19"/>
     <p:sldId id="260" r:id="rId6"/>
     <p:sldId id="261" r:id="rId7"/>
     <p:sldId id="262" r:id="rId8"/>
@@ -2233,6 +2234,10 @@
             <a:prstDash val="solid"/>
           </a:ln>
         </p:spPr>
+        <p:txBody>
+          <a:bodyPr/>
+          <a:p/>
+        </p:txBody>
       </p:sp>
       <p:sp>
         <p:nvSpPr>
@@ -2633,6 +2638,1620 @@
 </file>
 
 <file path=ppt/slides/slide10.xml><?xml version="1.0" encoding="utf-8"?>
+<p:sld xmlns:a="http://schemas.openxmlformats.org/drawingml/2006/main" xmlns:r="http://schemas.openxmlformats.org/officeDocument/2006/relationships" xmlns:p="http://schemas.openxmlformats.org/presentationml/2006/main">
+  <p:cSld name="Slide 9">
+    <p:bg>
+      <p:bgPr>
+        <a:solidFill>
+          <a:srgbClr val="F7F9FC"/>
+        </a:solidFill>
+      </p:bgPr>
+    </p:bg>
+    <p:spTree>
+      <p:nvGrpSpPr>
+        <p:cNvPr id="1" name=""/>
+        <p:cNvGrpSpPr/>
+        <p:nvPr/>
+      </p:nvGrpSpPr>
+      <p:grpSpPr>
+        <a:xfrm>
+          <a:off x="0" y="0"/>
+          <a:ext cx="0" cy="0"/>
+          <a:chOff x="0" y="0"/>
+          <a:chExt cx="0" cy="0"/>
+        </a:xfrm>
+      </p:grpSpPr>
+      <p:sp>
+        <p:nvSpPr>
+          <p:cNvPr id="2" name="Shape 0"/>
+          <p:cNvSpPr/>
+          <p:nvPr/>
+        </p:nvSpPr>
+        <p:spPr>
+          <a:xfrm>
+            <a:off x="0" y="0"/>
+            <a:ext cx="164592" cy="6858000"/>
+          </a:xfrm>
+          <a:prstGeom prst="rect">
+            <a:avLst/>
+          </a:prstGeom>
+          <a:solidFill>
+            <a:srgbClr val="1E2761"/>
+          </a:solidFill>
+          <a:ln w="12700">
+            <a:solidFill>
+              <a:srgbClr val="333333"/>
+            </a:solidFill>
+            <a:prstDash val="solid"/>
+          </a:ln>
+        </p:spPr>
+        <p:txBody>
+          <a:bodyPr/>
+          <a:p/>
+        </p:txBody>
+      </p:sp>
+      <p:sp>
+        <p:nvSpPr>
+          <p:cNvPr id="3" name="Text 1"/>
+          <p:cNvSpPr/>
+          <p:nvPr/>
+        </p:nvSpPr>
+        <p:spPr>
+          <a:xfrm>
+            <a:off x="502920" y="411480"/>
+            <a:ext cx="11247120" cy="274320"/>
+          </a:xfrm>
+          <a:prstGeom prst="rect">
+            <a:avLst/>
+          </a:prstGeom>
+          <a:noFill/>
+          <a:ln/>
+        </p:spPr>
+        <p:txBody>
+          <a:bodyPr wrap="square" lIns="0" tIns="0" rIns="0" bIns="0" rtlCol="0" anchor="ctr"/>
+          <a:lstStyle/>
+          <a:p>
+            <a:pPr indent="0" marL="0">
+              <a:buNone/>
+            </a:pPr>
+            <a:r>
+              <a:rPr lang="en-US" sz="1100" b="1" spc="600" kern="0" dirty="0">
+                <a:solidFill>
+                  <a:srgbClr val="028090"/>
+                </a:solidFill>
+                <a:latin typeface="Calibri" pitchFamily="34" charset="0"/>
+                <a:ea typeface="Calibri" pitchFamily="34" charset="-122"/>
+                <a:cs typeface="Calibri" pitchFamily="34" charset="-120"/>
+              </a:rPr>
+              <a:t>SECTION 8 · THREE DEPLOYMENT TOPOLOGIES</a:t>
+            </a:r>
+            <a:endParaRPr lang="en-US" sz="1100" dirty="0"/>
+          </a:p>
+        </p:txBody>
+      </p:sp>
+      <p:sp>
+        <p:nvSpPr>
+          <p:cNvPr id="4" name="Text 2"/>
+          <p:cNvSpPr/>
+          <p:nvPr/>
+        </p:nvSpPr>
+        <p:spPr>
+          <a:xfrm>
+            <a:off x="502920" y="685800"/>
+            <a:ext cx="11247120" cy="731520"/>
+          </a:xfrm>
+          <a:prstGeom prst="rect">
+            <a:avLst/>
+          </a:prstGeom>
+          <a:noFill/>
+          <a:ln/>
+        </p:spPr>
+        <p:txBody>
+          <a:bodyPr wrap="square" lIns="0" tIns="0" rIns="0" bIns="0" rtlCol="0" anchor="ctr"/>
+          <a:lstStyle/>
+          <a:p>
+            <a:pPr indent="0" marL="0">
+              <a:buNone/>
+            </a:pPr>
+            <a:r>
+              <a:rPr lang="en-US" sz="3200" b="1" dirty="0">
+                <a:solidFill>
+                  <a:srgbClr val="1E2761"/>
+                </a:solidFill>
+                <a:latin typeface="Georgia" pitchFamily="34" charset="0"/>
+                <a:ea typeface="Georgia" pitchFamily="34" charset="-122"/>
+                <a:cs typeface="Georgia" pitchFamily="34" charset="-120"/>
+              </a:rPr>
+              <a:t>Same code · privacy boundary on PII</a:t>
+            </a:r>
+            <a:endParaRPr lang="en-US" sz="3200" dirty="0"/>
+          </a:p>
+        </p:txBody>
+      </p:sp>
+      <p:sp>
+        <p:nvSpPr>
+          <p:cNvPr id="5" name="Text 3"/>
+          <p:cNvSpPr/>
+          <p:nvPr/>
+        </p:nvSpPr>
+        <p:spPr>
+          <a:xfrm>
+            <a:off x="502920" y="6446520"/>
+            <a:ext cx="7315200" cy="274320"/>
+          </a:xfrm>
+          <a:prstGeom prst="rect">
+            <a:avLst/>
+          </a:prstGeom>
+          <a:noFill/>
+          <a:ln/>
+        </p:spPr>
+        <p:txBody>
+          <a:bodyPr wrap="square" lIns="0" tIns="0" rIns="0" bIns="0" rtlCol="0" anchor="ctr"/>
+          <a:lstStyle/>
+          <a:p>
+            <a:pPr indent="0" marL="0">
+              <a:buNone/>
+            </a:pPr>
+            <a:r>
+              <a:rPr lang="en-US" sz="900" dirty="0">
+                <a:solidFill>
+                  <a:srgbClr val="6B7280"/>
+                </a:solidFill>
+                <a:latin typeface="Calibri" pitchFamily="34" charset="0"/>
+                <a:ea typeface="Calibri" pitchFamily="34" charset="-122"/>
+                <a:cs typeface="Calibri" pitchFamily="34" charset="-120"/>
+              </a:rPr>
+              <a:t>TTB Label Verification  ·  Take-Home Implementation Overview</a:t>
+            </a:r>
+            <a:endParaRPr lang="en-US" sz="900" dirty="0"/>
+          </a:p>
+        </p:txBody>
+      </p:sp>
+      <p:sp>
+        <p:nvSpPr>
+          <p:cNvPr id="6" name="Text 4"/>
+          <p:cNvSpPr/>
+          <p:nvPr/>
+        </p:nvSpPr>
+        <p:spPr>
+          <a:xfrm>
+            <a:off x="10972800" y="6446520"/>
+            <a:ext cx="914400" cy="274320"/>
+          </a:xfrm>
+          <a:prstGeom prst="rect">
+            <a:avLst/>
+          </a:prstGeom>
+          <a:noFill/>
+          <a:ln/>
+        </p:spPr>
+        <p:txBody>
+          <a:bodyPr wrap="square" lIns="0" tIns="0" rIns="0" bIns="0" rtlCol="0" anchor="ctr"/>
+          <a:lstStyle/>
+          <a:p>
+            <a:pPr algn="r" indent="0" marL="0">
+              <a:buNone/>
+            </a:pPr>
+            <a:r>
+              <a:rPr lang="en-US" sz="900" dirty="0">
+                <a:solidFill>
+                  <a:srgbClr val="6B7280"/>
+                </a:solidFill>
+                <a:latin typeface="Calibri" pitchFamily="34" charset="0"/>
+                <a:ea typeface="Calibri" pitchFamily="34" charset="-122"/>
+                <a:cs typeface="Calibri" pitchFamily="34" charset="-120"/>
+              </a:rPr>
+              <a:t>10 / 13</a:t>
+            </a:r>
+            <a:endParaRPr lang="en-US" sz="900" dirty="0"/>
+          </a:p>
+        </p:txBody>
+      </p:sp>
+      <p:sp>
+        <p:nvSpPr>
+          <p:cNvPr id="7" name="Shape 5"/>
+          <p:cNvSpPr/>
+          <p:nvPr/>
+        </p:nvSpPr>
+        <p:spPr>
+          <a:xfrm>
+            <a:off x="411480" y="1691640"/>
+            <a:ext cx="3657600" cy="4663440"/>
+          </a:xfrm>
+          <a:prstGeom prst="rect">
+            <a:avLst/>
+          </a:prstGeom>
+          <a:solidFill>
+            <a:srgbClr val="FFFFFF"/>
+          </a:solidFill>
+          <a:ln w="12700">
+            <a:solidFill>
+              <a:srgbClr val="CADCFC"/>
+            </a:solidFill>
+            <a:prstDash val="solid"/>
+          </a:ln>
+          <a:effectLst>
+            <a:outerShdw sx="100000" sy="100000" kx="0" ky="0" algn="bl" rotWithShape="0" blurRad="127000" dist="25400" dir="8100000">
+              <a:srgbClr val="000000">
+                <a:alpha val="6000"/>
+              </a:srgbClr>
+            </a:outerShdw>
+          </a:effectLst>
+        </p:spPr>
+        <p:txBody>
+          <a:bodyPr/>
+          <a:p/>
+        </p:txBody>
+      </p:sp>
+      <p:sp>
+        <p:nvSpPr>
+          <p:cNvPr id="8" name="Shape 6"/>
+          <p:cNvSpPr/>
+          <p:nvPr/>
+        </p:nvSpPr>
+        <p:spPr>
+          <a:xfrm>
+            <a:off x="411480" y="1691640"/>
+            <a:ext cx="3657600" cy="109728"/>
+          </a:xfrm>
+          <a:prstGeom prst="rect">
+            <a:avLst/>
+          </a:prstGeom>
+          <a:solidFill>
+            <a:srgbClr val="028090"/>
+          </a:solidFill>
+          <a:ln w="12700">
+            <a:solidFill>
+              <a:srgbClr val="333333"/>
+            </a:solidFill>
+            <a:prstDash val="solid"/>
+          </a:ln>
+        </p:spPr>
+        <p:txBody>
+          <a:bodyPr/>
+          <a:p/>
+        </p:txBody>
+      </p:sp>
+      <p:sp>
+        <p:nvSpPr>
+          <p:cNvPr id="9" name="Text 7"/>
+          <p:cNvSpPr/>
+          <p:nvPr/>
+        </p:nvSpPr>
+        <p:spPr>
+          <a:xfrm>
+            <a:off x="777240" y="1965960"/>
+            <a:ext cx="822960" cy="914400"/>
+          </a:xfrm>
+          <a:prstGeom prst="rect">
+            <a:avLst/>
+          </a:prstGeom>
+          <a:noFill/>
+          <a:ln/>
+        </p:spPr>
+        <p:txBody>
+          <a:bodyPr wrap="square" lIns="0" tIns="0" rIns="0" bIns="0" rtlCol="0" anchor="ctr"/>
+          <a:lstStyle/>
+          <a:p>
+            <a:pPr indent="0" marL="0">
+              <a:buNone/>
+            </a:pPr>
+            <a:r>
+              <a:rPr lang="en-US" sz="7200" b="1" dirty="0">
+                <a:solidFill>
+                  <a:srgbClr val="028090"/>
+                </a:solidFill>
+                <a:latin typeface="Georgia" pitchFamily="34" charset="0"/>
+                <a:ea typeface="Georgia" pitchFamily="34" charset="-122"/>
+                <a:cs typeface="Georgia" pitchFamily="34" charset="-120"/>
+              </a:rPr>
+              <a:t>A</a:t>
+            </a:r>
+            <a:endParaRPr lang="en-US" sz="7200" dirty="0"/>
+          </a:p>
+        </p:txBody>
+      </p:sp>
+      <p:pic>
+        <p:nvPicPr>
+          <p:cNvPr id="10" name="Image 0" descr="preencoded.png">    </p:cNvPr>
+          <p:cNvPicPr>
+            <a:picLocks noChangeAspect="1"/>
+          </p:cNvPicPr>
+          <p:nvPr/>
+        </p:nvPicPr>
+        <p:blipFill>
+          <a:blip r:embed="rId1"/>
+          <a:stretch>
+            <a:fillRect/>
+          </a:stretch>
+        </p:blipFill>
+        <p:spPr>
+          <a:xfrm>
+            <a:off x="3200400" y="2103120"/>
+            <a:ext cx="502920" cy="502920"/>
+          </a:xfrm>
+          <a:prstGeom prst="rect">
+            <a:avLst/>
+          </a:prstGeom>
+        </p:spPr>
+      </p:pic>
+      <p:sp>
+        <p:nvSpPr>
+          <p:cNvPr id="11" name="Shape 8"/>
+          <p:cNvSpPr/>
+          <p:nvPr/>
+        </p:nvSpPr>
+        <p:spPr>
+          <a:xfrm>
+            <a:off x="2514600" y="2057400"/>
+            <a:ext cx="594360" cy="274320"/>
+          </a:xfrm>
+          <a:prstGeom prst="rect">
+            <a:avLst/>
+          </a:prstGeom>
+          <a:solidFill>
+            <a:srgbClr val="028090"/>
+          </a:solidFill>
+          <a:ln w="12700">
+            <a:solidFill>
+              <a:srgbClr val="333333"/>
+            </a:solidFill>
+            <a:prstDash val="solid"/>
+          </a:ln>
+        </p:spPr>
+        <p:txBody>
+          <a:bodyPr/>
+          <a:p/>
+        </p:txBody>
+      </p:sp>
+      <p:sp>
+        <p:nvSpPr>
+          <p:cNvPr id="12" name="Text 9"/>
+          <p:cNvSpPr/>
+          <p:nvPr/>
+        </p:nvSpPr>
+        <p:spPr>
+          <a:xfrm>
+            <a:off x="2514600" y="2075688"/>
+            <a:ext cx="594360" cy="237744"/>
+          </a:xfrm>
+          <a:prstGeom prst="rect">
+            <a:avLst/>
+          </a:prstGeom>
+          <a:noFill/>
+          <a:ln/>
+        </p:spPr>
+        <p:txBody>
+          <a:bodyPr wrap="square" lIns="0" tIns="0" rIns="0" bIns="0" rtlCol="0" anchor="ctr"/>
+          <a:lstStyle/>
+          <a:p>
+            <a:pPr algn="ctr" indent="0" marL="0">
+              <a:buNone/>
+            </a:pPr>
+            <a:r>
+              <a:rPr lang="en-US" sz="900" b="1" spc="400" kern="0" dirty="0">
+                <a:solidFill>
+                  <a:srgbClr val="FFFFFF"/>
+                </a:solidFill>
+                <a:latin typeface="Calibri" pitchFamily="34" charset="0"/>
+                <a:ea typeface="Calibri" pitchFamily="34" charset="-122"/>
+                <a:cs typeface="Calibri" pitchFamily="34" charset="-120"/>
+              </a:rPr>
+              <a:t>LIVE</a:t>
+            </a:r>
+            <a:endParaRPr lang="en-US" sz="900" dirty="0"/>
+          </a:p>
+        </p:txBody>
+      </p:sp>
+      <p:sp>
+        <p:nvSpPr>
+          <p:cNvPr id="13" name="Text 10"/>
+          <p:cNvSpPr/>
+          <p:nvPr/>
+        </p:nvSpPr>
+        <p:spPr>
+          <a:xfrm>
+            <a:off x="777240" y="2971800"/>
+            <a:ext cx="2926080" cy="457200"/>
+          </a:xfrm>
+          <a:prstGeom prst="rect">
+            <a:avLst/>
+          </a:prstGeom>
+          <a:noFill/>
+          <a:ln/>
+        </p:spPr>
+        <p:txBody>
+          <a:bodyPr wrap="square" lIns="0" tIns="0" rIns="0" bIns="0" rtlCol="0" anchor="ctr"/>
+          <a:lstStyle/>
+          <a:p>
+            <a:pPr indent="0" marL="0">
+              <a:buNone/>
+            </a:pPr>
+            <a:r>
+              <a:rPr lang="en-US" sz="2200" b="1" dirty="0">
+                <a:solidFill>
+                  <a:srgbClr val="1E2761"/>
+                </a:solidFill>
+                <a:latin typeface="Georgia" pitchFamily="34" charset="0"/>
+                <a:ea typeface="Georgia" pitchFamily="34" charset="-122"/>
+                <a:cs typeface="Georgia" pitchFamily="34" charset="-120"/>
+              </a:rPr>
+              <a:t>Privacy-focused hybrid</a:t>
+            </a:r>
+            <a:endParaRPr lang="en-US" sz="2200" dirty="0"/>
+          </a:p>
+        </p:txBody>
+      </p:sp>
+      <p:sp>
+        <p:nvSpPr>
+          <p:cNvPr id="14" name="Text 11"/>
+          <p:cNvSpPr/>
+          <p:nvPr/>
+        </p:nvSpPr>
+        <p:spPr>
+          <a:xfrm>
+            <a:off x="777240" y="3429000"/>
+            <a:ext cx="2926080" cy="320040"/>
+          </a:xfrm>
+          <a:prstGeom prst="rect">
+            <a:avLst/>
+          </a:prstGeom>
+          <a:noFill/>
+          <a:ln/>
+        </p:spPr>
+        <p:txBody>
+          <a:bodyPr wrap="square" lIns="0" tIns="0" rIns="0" bIns="0" rtlCol="0" anchor="ctr"/>
+          <a:lstStyle/>
+          <a:p>
+            <a:pPr indent="0" marL="0">
+              <a:buNone/>
+            </a:pPr>
+            <a:r>
+              <a:rPr lang="en-US" sz="1100" b="1" spc="300" kern="0" dirty="0">
+                <a:solidFill>
+                  <a:srgbClr val="028090"/>
+                </a:solidFill>
+                <a:latin typeface="Calibri" pitchFamily="34" charset="0"/>
+                <a:ea typeface="Calibri" pitchFamily="34" charset="-122"/>
+                <a:cs typeface="Calibri" pitchFamily="34" charset="-120"/>
+              </a:rPr>
+              <a:t>Vercel + Modal Qwen v2 + Haiku — currently live</a:t>
+            </a:r>
+            <a:endParaRPr lang="en-US" sz="1100" dirty="0"/>
+          </a:p>
+        </p:txBody>
+      </p:sp>
+      <p:sp>
+        <p:nvSpPr>
+          <p:cNvPr id="15" name="Text 12"/>
+          <p:cNvSpPr/>
+          <p:nvPr/>
+        </p:nvSpPr>
+        <p:spPr>
+          <a:xfrm>
+            <a:off x="777240" y="3840480"/>
+            <a:ext cx="2926080" cy="1645920"/>
+          </a:xfrm>
+          <a:prstGeom prst="rect">
+            <a:avLst/>
+          </a:prstGeom>
+          <a:noFill/>
+          <a:ln/>
+        </p:spPr>
+        <p:txBody>
+          <a:bodyPr wrap="square" lIns="0" tIns="0" rIns="0" bIns="0" rtlCol="0" anchor="ctr"/>
+          <a:lstStyle/>
+          <a:p>
+            <a:pPr indent="0" marL="0">
+              <a:buNone/>
+            </a:pPr>
+            <a:r>
+              <a:rPr lang="en-US" sz="1200" dirty="0">
+                <a:solidFill>
+                  <a:srgbClr val="1F2937"/>
+                </a:solidFill>
+                <a:latin typeface="Calibri" pitchFamily="34" charset="0"/>
+                <a:ea typeface="Calibri" pitchFamily="34" charset="-122"/>
+                <a:cs typeface="Calibri" pitchFamily="34" charset="-120"/>
+              </a:rPr>
+              <a:t>React on Vercel CDN. Modal Qwen v2 LoRA on a container WE control reads the 4 PII fields (brand, class, bottler, country). Anthropic Haiku reads the 27 CFR 16.21 verbatim warning text + ABV + net contents — all public-text values with no privacy classification. Label images traverse Modal (our boundary) and Haiku (public-text only).</a:t>
+            </a:r>
+            <a:endParaRPr lang="en-US" sz="1200" dirty="0"/>
+          </a:p>
+        </p:txBody>
+      </p:sp>
+      <p:sp>
+        <p:nvSpPr>
+          <p:cNvPr id="16" name="Shape 13"/>
+          <p:cNvSpPr/>
+          <p:nvPr/>
+        </p:nvSpPr>
+        <p:spPr>
+          <a:xfrm>
+            <a:off x="777240" y="5577840"/>
+            <a:ext cx="2926080" cy="18288"/>
+          </a:xfrm>
+          <a:prstGeom prst="rect">
+            <a:avLst/>
+          </a:prstGeom>
+          <a:solidFill>
+            <a:srgbClr val="CADCFC"/>
+          </a:solidFill>
+          <a:ln w="12700">
+            <a:solidFill>
+              <a:srgbClr val="333333"/>
+            </a:solidFill>
+            <a:prstDash val="solid"/>
+          </a:ln>
+        </p:spPr>
+        <p:txBody>
+          <a:bodyPr/>
+          <a:p/>
+        </p:txBody>
+      </p:sp>
+      <p:sp>
+        <p:nvSpPr>
+          <p:cNvPr id="17" name="Text 14"/>
+          <p:cNvSpPr/>
+          <p:nvPr/>
+        </p:nvSpPr>
+        <p:spPr>
+          <a:xfrm>
+            <a:off x="777240" y="5669280"/>
+            <a:ext cx="2926080" cy="201168"/>
+          </a:xfrm>
+          <a:prstGeom prst="rect">
+            <a:avLst/>
+          </a:prstGeom>
+          <a:noFill/>
+          <a:ln/>
+        </p:spPr>
+        <p:txBody>
+          <a:bodyPr wrap="square" lIns="0" tIns="0" rIns="0" bIns="0" rtlCol="0" anchor="ctr"/>
+          <a:lstStyle/>
+          <a:p>
+            <a:pPr indent="0" marL="0">
+              <a:buNone/>
+            </a:pPr>
+            <a:r>
+              <a:rPr lang="en-US" sz="900" b="1" spc="300" kern="0" dirty="0">
+                <a:solidFill>
+                  <a:srgbClr val="6B7280"/>
+                </a:solidFill>
+                <a:latin typeface="Calibri" pitchFamily="34" charset="0"/>
+                <a:ea typeface="Calibri" pitchFamily="34" charset="-122"/>
+                <a:cs typeface="Calibri" pitchFamily="34" charset="-120"/>
+              </a:rPr>
+              <a:t>Cost</a:t>
+            </a:r>
+            <a:endParaRPr lang="en-US" sz="900" dirty="0"/>
+          </a:p>
+        </p:txBody>
+      </p:sp>
+      <p:sp>
+        <p:nvSpPr>
+          <p:cNvPr id="18" name="Text 15"/>
+          <p:cNvSpPr/>
+          <p:nvPr/>
+        </p:nvSpPr>
+        <p:spPr>
+          <a:xfrm>
+            <a:off x="777240" y="5852160"/>
+            <a:ext cx="2926080" cy="201168"/>
+          </a:xfrm>
+          <a:prstGeom prst="rect">
+            <a:avLst/>
+          </a:prstGeom>
+          <a:noFill/>
+          <a:ln/>
+        </p:spPr>
+        <p:txBody>
+          <a:bodyPr wrap="square" lIns="0" tIns="0" rIns="0" bIns="0" rtlCol="0" anchor="ctr"/>
+          <a:lstStyle/>
+          <a:p>
+            <a:pPr indent="0" marL="0">
+              <a:buNone/>
+            </a:pPr>
+            <a:r>
+              <a:rPr lang="en-US" sz="1100" dirty="0">
+                <a:solidFill>
+                  <a:srgbClr val="1F2937"/>
+                </a:solidFill>
+                <a:latin typeface="Calibri" pitchFamily="34" charset="0"/>
+                <a:ea typeface="Calibri" pitchFamily="34" charset="-122"/>
+                <a:cs typeface="Calibri" pitchFamily="34" charset="-120"/>
+              </a:rPr>
+              <a:t>$0–5/mo + $1/1000 labels</a:t>
+            </a:r>
+            <a:endParaRPr lang="en-US" sz="1100" dirty="0"/>
+          </a:p>
+        </p:txBody>
+      </p:sp>
+      <p:sp>
+        <p:nvSpPr>
+          <p:cNvPr id="19" name="Text 16"/>
+          <p:cNvSpPr/>
+          <p:nvPr/>
+        </p:nvSpPr>
+        <p:spPr>
+          <a:xfrm>
+            <a:off x="777240" y="6062472"/>
+            <a:ext cx="2926080" cy="201168"/>
+          </a:xfrm>
+          <a:prstGeom prst="rect">
+            <a:avLst/>
+          </a:prstGeom>
+          <a:noFill/>
+          <a:ln/>
+        </p:spPr>
+        <p:txBody>
+          <a:bodyPr wrap="square" lIns="0" tIns="0" rIns="0" bIns="0" rtlCol="0" anchor="ctr"/>
+          <a:lstStyle/>
+          <a:p>
+            <a:pPr indent="0" marL="0">
+              <a:buNone/>
+            </a:pPr>
+            <a:r>
+              <a:rPr lang="en-US" sz="900" b="1" spc="300" kern="0" dirty="0">
+                <a:solidFill>
+                  <a:srgbClr val="6B7280"/>
+                </a:solidFill>
+                <a:latin typeface="Calibri" pitchFamily="34" charset="0"/>
+                <a:ea typeface="Calibri" pitchFamily="34" charset="-122"/>
+                <a:cs typeface="Calibri" pitchFamily="34" charset="-120"/>
+              </a:rPr>
+              <a:t>Privacy</a:t>
+            </a:r>
+            <a:endParaRPr lang="en-US" sz="900" dirty="0"/>
+          </a:p>
+        </p:txBody>
+      </p:sp>
+      <p:sp>
+        <p:nvSpPr>
+          <p:cNvPr id="20" name="Text 17"/>
+          <p:cNvSpPr/>
+          <p:nvPr/>
+        </p:nvSpPr>
+        <p:spPr>
+          <a:xfrm>
+            <a:off x="777240" y="6245352"/>
+            <a:ext cx="2926080" cy="201168"/>
+          </a:xfrm>
+          <a:prstGeom prst="rect">
+            <a:avLst/>
+          </a:prstGeom>
+          <a:noFill/>
+          <a:ln/>
+        </p:spPr>
+        <p:txBody>
+          <a:bodyPr wrap="square" lIns="0" tIns="0" rIns="0" bIns="0" rtlCol="0" anchor="ctr"/>
+          <a:lstStyle/>
+          <a:p>
+            <a:pPr indent="0" marL="0">
+              <a:buNone/>
+            </a:pPr>
+            <a:r>
+              <a:rPr lang="en-US" sz="1100" dirty="0">
+                <a:solidFill>
+                  <a:srgbClr val="1F2937"/>
+                </a:solidFill>
+                <a:latin typeface="Calibri" pitchFamily="34" charset="0"/>
+                <a:ea typeface="Calibri" pitchFamily="34" charset="-122"/>
+                <a:cs typeface="Calibri" pitchFamily="34" charset="-120"/>
+              </a:rPr>
+              <a:t>Modal boundary on PII · Haiku for 27 CFR public text only</a:t>
+            </a:r>
+            <a:endParaRPr lang="en-US" sz="1100" dirty="0"/>
+          </a:p>
+        </p:txBody>
+      </p:sp>
+      <p:sp>
+        <p:nvSpPr>
+          <p:cNvPr id="21" name="Shape 18"/>
+          <p:cNvSpPr/>
+          <p:nvPr/>
+        </p:nvSpPr>
+        <p:spPr>
+          <a:xfrm>
+            <a:off x="4251960" y="1691640"/>
+            <a:ext cx="3657600" cy="4663440"/>
+          </a:xfrm>
+          <a:prstGeom prst="rect">
+            <a:avLst/>
+          </a:prstGeom>
+          <a:solidFill>
+            <a:srgbClr val="FFFFFF"/>
+          </a:solidFill>
+          <a:ln w="12700">
+            <a:solidFill>
+              <a:srgbClr val="CADCFC"/>
+            </a:solidFill>
+            <a:prstDash val="solid"/>
+          </a:ln>
+          <a:effectLst>
+            <a:outerShdw sx="100000" sy="100000" kx="0" ky="0" algn="bl" rotWithShape="0" blurRad="127000" dist="25400" dir="8100000">
+              <a:srgbClr val="000000">
+                <a:alpha val="6000"/>
+              </a:srgbClr>
+            </a:outerShdw>
+          </a:effectLst>
+        </p:spPr>
+        <p:txBody>
+          <a:bodyPr/>
+          <a:p/>
+        </p:txBody>
+      </p:sp>
+      <p:sp>
+        <p:nvSpPr>
+          <p:cNvPr id="22" name="Shape 19"/>
+          <p:cNvSpPr/>
+          <p:nvPr/>
+        </p:nvSpPr>
+        <p:spPr>
+          <a:xfrm>
+            <a:off x="4251960" y="1691640"/>
+            <a:ext cx="3657600" cy="109728"/>
+          </a:xfrm>
+          <a:prstGeom prst="rect">
+            <a:avLst/>
+          </a:prstGeom>
+          <a:solidFill>
+            <a:srgbClr val="1E2761"/>
+          </a:solidFill>
+          <a:ln w="12700">
+            <a:solidFill>
+              <a:srgbClr val="333333"/>
+            </a:solidFill>
+            <a:prstDash val="solid"/>
+          </a:ln>
+        </p:spPr>
+        <p:txBody>
+          <a:bodyPr/>
+          <a:p/>
+        </p:txBody>
+      </p:sp>
+      <p:sp>
+        <p:nvSpPr>
+          <p:cNvPr id="23" name="Text 20"/>
+          <p:cNvSpPr/>
+          <p:nvPr/>
+        </p:nvSpPr>
+        <p:spPr>
+          <a:xfrm>
+            <a:off x="4617720" y="1965960"/>
+            <a:ext cx="822960" cy="914400"/>
+          </a:xfrm>
+          <a:prstGeom prst="rect">
+            <a:avLst/>
+          </a:prstGeom>
+          <a:noFill/>
+          <a:ln/>
+        </p:spPr>
+        <p:txBody>
+          <a:bodyPr wrap="square" lIns="0" tIns="0" rIns="0" bIns="0" rtlCol="0" anchor="ctr"/>
+          <a:lstStyle/>
+          <a:p>
+            <a:pPr indent="0" marL="0">
+              <a:buNone/>
+            </a:pPr>
+            <a:r>
+              <a:rPr lang="en-US" sz="7200" b="1" dirty="0">
+                <a:solidFill>
+                  <a:srgbClr val="1E2761"/>
+                </a:solidFill>
+                <a:latin typeface="Georgia" pitchFamily="34" charset="0"/>
+                <a:ea typeface="Georgia" pitchFamily="34" charset="-122"/>
+                <a:cs typeface="Georgia" pitchFamily="34" charset="-120"/>
+              </a:rPr>
+              <a:t>B</a:t>
+            </a:r>
+            <a:endParaRPr lang="en-US" sz="7200" dirty="0"/>
+          </a:p>
+        </p:txBody>
+      </p:sp>
+      <p:pic>
+        <p:nvPicPr>
+          <p:cNvPr id="24" name="Image 1" descr="preencoded.png">    </p:cNvPr>
+          <p:cNvPicPr>
+            <a:picLocks noChangeAspect="1"/>
+          </p:cNvPicPr>
+          <p:nvPr/>
+        </p:nvPicPr>
+        <p:blipFill>
+          <a:blip r:embed="rId2"/>
+          <a:stretch>
+            <a:fillRect/>
+          </a:stretch>
+        </p:blipFill>
+        <p:spPr>
+          <a:xfrm>
+            <a:off x="7040880" y="2103120"/>
+            <a:ext cx="502920" cy="502920"/>
+          </a:xfrm>
+          <a:prstGeom prst="rect">
+            <a:avLst/>
+          </a:prstGeom>
+        </p:spPr>
+      </p:pic>
+      <p:sp>
+        <p:nvSpPr>
+          <p:cNvPr id="25" name="Text 21"/>
+          <p:cNvSpPr/>
+          <p:nvPr/>
+        </p:nvSpPr>
+        <p:spPr>
+          <a:xfrm>
+            <a:off x="4617720" y="2971800"/>
+            <a:ext cx="2926080" cy="457200"/>
+          </a:xfrm>
+          <a:prstGeom prst="rect">
+            <a:avLst/>
+          </a:prstGeom>
+          <a:noFill/>
+          <a:ln/>
+        </p:spPr>
+        <p:txBody>
+          <a:bodyPr wrap="square" lIns="0" tIns="0" rIns="0" bIns="0" rtlCol="0" anchor="ctr"/>
+          <a:lstStyle/>
+          <a:p>
+            <a:pPr indent="0" marL="0">
+              <a:buNone/>
+            </a:pPr>
+            <a:r>
+              <a:rPr lang="en-US" sz="2200" b="1" dirty="0">
+                <a:solidFill>
+                  <a:srgbClr val="1E2761"/>
+                </a:solidFill>
+                <a:latin typeface="Georgia" pitchFamily="34" charset="0"/>
+                <a:ea typeface="Georgia" pitchFamily="34" charset="-122"/>
+                <a:cs typeface="Georgia" pitchFamily="34" charset="-120"/>
+              </a:rPr>
+              <a:t>Privacy-only (no commodity model)</a:t>
+            </a:r>
+            <a:endParaRPr lang="en-US" sz="2200" dirty="0"/>
+          </a:p>
+        </p:txBody>
+      </p:sp>
+      <p:sp>
+        <p:nvSpPr>
+          <p:cNvPr id="26" name="Text 22"/>
+          <p:cNvSpPr/>
+          <p:nvPr/>
+        </p:nvSpPr>
+        <p:spPr>
+          <a:xfrm>
+            <a:off x="4617720" y="3429000"/>
+            <a:ext cx="2926080" cy="320040"/>
+          </a:xfrm>
+          <a:prstGeom prst="rect">
+            <a:avLst/>
+          </a:prstGeom>
+          <a:noFill/>
+          <a:ln/>
+        </p:spPr>
+        <p:txBody>
+          <a:bodyPr wrap="square" lIns="0" tIns="0" rIns="0" bIns="0" rtlCol="0" anchor="ctr"/>
+          <a:lstStyle/>
+          <a:p>
+            <a:pPr indent="0" marL="0">
+              <a:buNone/>
+            </a:pPr>
+            <a:r>
+              <a:rPr lang="en-US" sz="1100" b="1" spc="300" kern="0" dirty="0">
+                <a:solidFill>
+                  <a:srgbClr val="6B7280"/>
+                </a:solidFill>
+                <a:latin typeface="Calibri" pitchFamily="34" charset="0"/>
+                <a:ea typeface="Calibri" pitchFamily="34" charset="-122"/>
+                <a:cs typeface="Calibri" pitchFamily="34" charset="-120"/>
+              </a:rPr>
+              <a:t>Modal Qwen v2 only · Tesseract for warning</a:t>
+            </a:r>
+            <a:endParaRPr lang="en-US" sz="1100" dirty="0"/>
+          </a:p>
+        </p:txBody>
+      </p:sp>
+      <p:sp>
+        <p:nvSpPr>
+          <p:cNvPr id="27" name="Text 23"/>
+          <p:cNvSpPr/>
+          <p:nvPr/>
+        </p:nvSpPr>
+        <p:spPr>
+          <a:xfrm>
+            <a:off x="4617720" y="3840480"/>
+            <a:ext cx="2926080" cy="1645920"/>
+          </a:xfrm>
+          <a:prstGeom prst="rect">
+            <a:avLst/>
+          </a:prstGeom>
+          <a:noFill/>
+          <a:ln/>
+        </p:spPr>
+        <p:txBody>
+          <a:bodyPr wrap="square" lIns="0" tIns="0" rIns="0" bIns="0" rtlCol="0" anchor="ctr"/>
+          <a:lstStyle/>
+          <a:p>
+            <a:pPr indent="0" marL="0">
+              <a:buNone/>
+            </a:pPr>
+            <a:r>
+              <a:rPr lang="en-US" sz="1200" dirty="0">
+                <a:solidFill>
+                  <a:srgbClr val="1F2937"/>
+                </a:solidFill>
+                <a:latin typeface="Calibri" pitchFamily="34" charset="0"/>
+                <a:ea typeface="Calibri" pitchFamily="34" charset="-122"/>
+                <a:cs typeface="Calibri" pitchFamily="34" charset="-120"/>
+              </a:rPr>
+              <a:t>Same React + FastAPI. Modal Qwen v2 + Modal Tesseract container handle every field — Haiku is removed entirely. Government Warning verbatim falls back to Tesseract regex. Use when no third-party API is acceptable in the data path.</a:t>
+            </a:r>
+            <a:endParaRPr lang="en-US" sz="1200" dirty="0"/>
+          </a:p>
+        </p:txBody>
+      </p:sp>
+      <p:sp>
+        <p:nvSpPr>
+          <p:cNvPr id="28" name="Shape 24"/>
+          <p:cNvSpPr/>
+          <p:nvPr/>
+        </p:nvSpPr>
+        <p:spPr>
+          <a:xfrm>
+            <a:off x="4617720" y="5577840"/>
+            <a:ext cx="2926080" cy="18288"/>
+          </a:xfrm>
+          <a:prstGeom prst="rect">
+            <a:avLst/>
+          </a:prstGeom>
+          <a:solidFill>
+            <a:srgbClr val="CADCFC"/>
+          </a:solidFill>
+          <a:ln w="12700">
+            <a:solidFill>
+              <a:srgbClr val="333333"/>
+            </a:solidFill>
+            <a:prstDash val="solid"/>
+          </a:ln>
+        </p:spPr>
+        <p:txBody>
+          <a:bodyPr/>
+          <a:p/>
+        </p:txBody>
+      </p:sp>
+      <p:sp>
+        <p:nvSpPr>
+          <p:cNvPr id="29" name="Text 25"/>
+          <p:cNvSpPr/>
+          <p:nvPr/>
+        </p:nvSpPr>
+        <p:spPr>
+          <a:xfrm>
+            <a:off x="4617720" y="5669280"/>
+            <a:ext cx="2926080" cy="201168"/>
+          </a:xfrm>
+          <a:prstGeom prst="rect">
+            <a:avLst/>
+          </a:prstGeom>
+          <a:noFill/>
+          <a:ln/>
+        </p:spPr>
+        <p:txBody>
+          <a:bodyPr wrap="square" lIns="0" tIns="0" rIns="0" bIns="0" rtlCol="0" anchor="ctr"/>
+          <a:lstStyle/>
+          <a:p>
+            <a:pPr indent="0" marL="0">
+              <a:buNone/>
+            </a:pPr>
+            <a:r>
+              <a:rPr lang="en-US" sz="900" b="1" spc="300" kern="0" dirty="0">
+                <a:solidFill>
+                  <a:srgbClr val="6B7280"/>
+                </a:solidFill>
+                <a:latin typeface="Calibri" pitchFamily="34" charset="0"/>
+                <a:ea typeface="Calibri" pitchFamily="34" charset="-122"/>
+                <a:cs typeface="Calibri" pitchFamily="34" charset="-120"/>
+              </a:rPr>
+              <a:t>Cost</a:t>
+            </a:r>
+            <a:endParaRPr lang="en-US" sz="900" dirty="0"/>
+          </a:p>
+        </p:txBody>
+      </p:sp>
+      <p:sp>
+        <p:nvSpPr>
+          <p:cNvPr id="30" name="Text 26"/>
+          <p:cNvSpPr/>
+          <p:nvPr/>
+        </p:nvSpPr>
+        <p:spPr>
+          <a:xfrm>
+            <a:off x="4617720" y="5852160"/>
+            <a:ext cx="2926080" cy="201168"/>
+          </a:xfrm>
+          <a:prstGeom prst="rect">
+            <a:avLst/>
+          </a:prstGeom>
+          <a:noFill/>
+          <a:ln/>
+        </p:spPr>
+        <p:txBody>
+          <a:bodyPr wrap="square" lIns="0" tIns="0" rIns="0" bIns="0" rtlCol="0" anchor="ctr"/>
+          <a:lstStyle/>
+          <a:p>
+            <a:pPr indent="0" marL="0">
+              <a:buNone/>
+            </a:pPr>
+            <a:r>
+              <a:rPr lang="en-US" sz="1100" dirty="0">
+                <a:solidFill>
+                  <a:srgbClr val="1F2937"/>
+                </a:solidFill>
+                <a:latin typeface="Calibri" pitchFamily="34" charset="0"/>
+                <a:ea typeface="Calibri" pitchFamily="34" charset="-122"/>
+                <a:cs typeface="Calibri" pitchFamily="34" charset="-120"/>
+              </a:rPr>
+              <a:t>$0/hr idle · $0.001/req active</a:t>
+            </a:r>
+            <a:endParaRPr lang="en-US" sz="1100" dirty="0"/>
+          </a:p>
+        </p:txBody>
+      </p:sp>
+      <p:sp>
+        <p:nvSpPr>
+          <p:cNvPr id="31" name="Text 27"/>
+          <p:cNvSpPr/>
+          <p:nvPr/>
+        </p:nvSpPr>
+        <p:spPr>
+          <a:xfrm>
+            <a:off x="4617720" y="6062472"/>
+            <a:ext cx="2926080" cy="201168"/>
+          </a:xfrm>
+          <a:prstGeom prst="rect">
+            <a:avLst/>
+          </a:prstGeom>
+          <a:noFill/>
+          <a:ln/>
+        </p:spPr>
+        <p:txBody>
+          <a:bodyPr wrap="square" lIns="0" tIns="0" rIns="0" bIns="0" rtlCol="0" anchor="ctr"/>
+          <a:lstStyle/>
+          <a:p>
+            <a:pPr indent="0" marL="0">
+              <a:buNone/>
+            </a:pPr>
+            <a:r>
+              <a:rPr lang="en-US" sz="900" b="1" spc="300" kern="0" dirty="0">
+                <a:solidFill>
+                  <a:srgbClr val="6B7280"/>
+                </a:solidFill>
+                <a:latin typeface="Calibri" pitchFamily="34" charset="0"/>
+                <a:ea typeface="Calibri" pitchFamily="34" charset="-122"/>
+                <a:cs typeface="Calibri" pitchFamily="34" charset="-120"/>
+              </a:rPr>
+              <a:t>Privacy</a:t>
+            </a:r>
+            <a:endParaRPr lang="en-US" sz="900" dirty="0"/>
+          </a:p>
+        </p:txBody>
+      </p:sp>
+      <p:sp>
+        <p:nvSpPr>
+          <p:cNvPr id="32" name="Text 28"/>
+          <p:cNvSpPr/>
+          <p:nvPr/>
+        </p:nvSpPr>
+        <p:spPr>
+          <a:xfrm>
+            <a:off x="4617720" y="6245352"/>
+            <a:ext cx="2926080" cy="201168"/>
+          </a:xfrm>
+          <a:prstGeom prst="rect">
+            <a:avLst/>
+          </a:prstGeom>
+          <a:noFill/>
+          <a:ln/>
+        </p:spPr>
+        <p:txBody>
+          <a:bodyPr wrap="square" lIns="0" tIns="0" rIns="0" bIns="0" rtlCol="0" anchor="ctr"/>
+          <a:lstStyle/>
+          <a:p>
+            <a:pPr indent="0" marL="0">
+              <a:buNone/>
+            </a:pPr>
+            <a:r>
+              <a:rPr lang="en-US" sz="1100" dirty="0">
+                <a:solidFill>
+                  <a:srgbClr val="1F2937"/>
+                </a:solidFill>
+                <a:latin typeface="Calibri" pitchFamily="34" charset="0"/>
+                <a:ea typeface="Calibri" pitchFamily="34" charset="-122"/>
+                <a:cs typeface="Calibri" pitchFamily="34" charset="-120"/>
+              </a:rPr>
+              <a:t>Zero third-party API · single provider</a:t>
+            </a:r>
+            <a:endParaRPr lang="en-US" sz="1100" dirty="0"/>
+          </a:p>
+        </p:txBody>
+      </p:sp>
+      <p:sp>
+        <p:nvSpPr>
+          <p:cNvPr id="33" name="Shape 29"/>
+          <p:cNvSpPr/>
+          <p:nvPr/>
+        </p:nvSpPr>
+        <p:spPr>
+          <a:xfrm>
+            <a:off x="8092440" y="1691640"/>
+            <a:ext cx="3657600" cy="4663440"/>
+          </a:xfrm>
+          <a:prstGeom prst="rect">
+            <a:avLst/>
+          </a:prstGeom>
+          <a:solidFill>
+            <a:srgbClr val="FFFFFF"/>
+          </a:solidFill>
+          <a:ln w="12700">
+            <a:solidFill>
+              <a:srgbClr val="CADCFC"/>
+            </a:solidFill>
+            <a:prstDash val="solid"/>
+          </a:ln>
+          <a:effectLst>
+            <a:outerShdw sx="100000" sy="100000" kx="0" ky="0" algn="bl" rotWithShape="0" blurRad="127000" dist="25400" dir="8100000">
+              <a:srgbClr val="000000">
+                <a:alpha val="6000"/>
+              </a:srgbClr>
+            </a:outerShdw>
+          </a:effectLst>
+        </p:spPr>
+        <p:txBody>
+          <a:bodyPr/>
+          <a:p/>
+        </p:txBody>
+      </p:sp>
+      <p:sp>
+        <p:nvSpPr>
+          <p:cNvPr id="34" name="Shape 30"/>
+          <p:cNvSpPr/>
+          <p:nvPr/>
+        </p:nvSpPr>
+        <p:spPr>
+          <a:xfrm>
+            <a:off x="8092440" y="1691640"/>
+            <a:ext cx="3657600" cy="109728"/>
+          </a:xfrm>
+          <a:prstGeom prst="rect">
+            <a:avLst/>
+          </a:prstGeom>
+          <a:solidFill>
+            <a:srgbClr val="1E2761"/>
+          </a:solidFill>
+          <a:ln w="12700">
+            <a:solidFill>
+              <a:srgbClr val="333333"/>
+            </a:solidFill>
+            <a:prstDash val="solid"/>
+          </a:ln>
+        </p:spPr>
+        <p:txBody>
+          <a:bodyPr/>
+          <a:p/>
+        </p:txBody>
+      </p:sp>
+      <p:sp>
+        <p:nvSpPr>
+          <p:cNvPr id="35" name="Text 31"/>
+          <p:cNvSpPr/>
+          <p:nvPr/>
+        </p:nvSpPr>
+        <p:spPr>
+          <a:xfrm>
+            <a:off x="8458200" y="1965960"/>
+            <a:ext cx="822960" cy="914400"/>
+          </a:xfrm>
+          <a:prstGeom prst="rect">
+            <a:avLst/>
+          </a:prstGeom>
+          <a:noFill/>
+          <a:ln/>
+        </p:spPr>
+        <p:txBody>
+          <a:bodyPr wrap="square" lIns="0" tIns="0" rIns="0" bIns="0" rtlCol="0" anchor="ctr"/>
+          <a:lstStyle/>
+          <a:p>
+            <a:pPr indent="0" marL="0">
+              <a:buNone/>
+            </a:pPr>
+            <a:r>
+              <a:rPr lang="en-US" sz="7200" b="1" dirty="0">
+                <a:solidFill>
+                  <a:srgbClr val="1E2761"/>
+                </a:solidFill>
+                <a:latin typeface="Georgia" pitchFamily="34" charset="0"/>
+                <a:ea typeface="Georgia" pitchFamily="34" charset="-122"/>
+                <a:cs typeface="Georgia" pitchFamily="34" charset="-120"/>
+              </a:rPr>
+              <a:t>C</a:t>
+            </a:r>
+            <a:endParaRPr lang="en-US" sz="7200" dirty="0"/>
+          </a:p>
+        </p:txBody>
+      </p:sp>
+      <p:pic>
+        <p:nvPicPr>
+          <p:cNvPr id="36" name="Image 2" descr="preencoded.png">    </p:cNvPr>
+          <p:cNvPicPr>
+            <a:picLocks noChangeAspect="1"/>
+          </p:cNvPicPr>
+          <p:nvPr/>
+        </p:nvPicPr>
+        <p:blipFill>
+          <a:blip r:embed="rId3"/>
+          <a:stretch>
+            <a:fillRect/>
+          </a:stretch>
+        </p:blipFill>
+        <p:spPr>
+          <a:xfrm>
+            <a:off x="10881360" y="2103120"/>
+            <a:ext cx="502920" cy="502920"/>
+          </a:xfrm>
+          <a:prstGeom prst="rect">
+            <a:avLst/>
+          </a:prstGeom>
+        </p:spPr>
+      </p:pic>
+      <p:sp>
+        <p:nvSpPr>
+          <p:cNvPr id="37" name="Text 32"/>
+          <p:cNvSpPr/>
+          <p:nvPr/>
+        </p:nvSpPr>
+        <p:spPr>
+          <a:xfrm>
+            <a:off x="8458200" y="2971800"/>
+            <a:ext cx="2926080" cy="457200"/>
+          </a:xfrm>
+          <a:prstGeom prst="rect">
+            <a:avLst/>
+          </a:prstGeom>
+          <a:noFill/>
+          <a:ln/>
+        </p:spPr>
+        <p:txBody>
+          <a:bodyPr wrap="square" lIns="0" tIns="0" rIns="0" bIns="0" rtlCol="0" anchor="ctr"/>
+          <a:lstStyle/>
+          <a:p>
+            <a:pPr indent="0" marL="0">
+              <a:buNone/>
+            </a:pPr>
+            <a:r>
+              <a:rPr lang="en-US" sz="2200" b="1" dirty="0">
+                <a:solidFill>
+                  <a:srgbClr val="1E2761"/>
+                </a:solidFill>
+                <a:latin typeface="Georgia" pitchFamily="34" charset="0"/>
+                <a:ea typeface="Georgia" pitchFamily="34" charset="-122"/>
+                <a:cs typeface="Georgia" pitchFamily="34" charset="-120"/>
+              </a:rPr>
+              <a:t>Agency-hosted</a:t>
+            </a:r>
+            <a:endParaRPr lang="en-US" sz="2200" dirty="0"/>
+          </a:p>
+        </p:txBody>
+      </p:sp>
+      <p:sp>
+        <p:nvSpPr>
+          <p:cNvPr id="38" name="Text 33"/>
+          <p:cNvSpPr/>
+          <p:nvPr/>
+        </p:nvSpPr>
+        <p:spPr>
+          <a:xfrm>
+            <a:off x="8458200" y="3429000"/>
+            <a:ext cx="2926080" cy="320040"/>
+          </a:xfrm>
+          <a:prstGeom prst="rect">
+            <a:avLst/>
+          </a:prstGeom>
+          <a:noFill/>
+          <a:ln/>
+        </p:spPr>
+        <p:txBody>
+          <a:bodyPr wrap="square" lIns="0" tIns="0" rIns="0" bIns="0" rtlCol="0" anchor="ctr"/>
+          <a:lstStyle/>
+          <a:p>
+            <a:pPr indent="0" marL="0">
+              <a:buNone/>
+            </a:pPr>
+            <a:r>
+              <a:rPr lang="en-US" sz="1100" b="1" spc="300" kern="0" dirty="0">
+                <a:solidFill>
+                  <a:srgbClr val="6B7280"/>
+                </a:solidFill>
+                <a:latin typeface="Calibri" pitchFamily="34" charset="0"/>
+                <a:ea typeface="Calibri" pitchFamily="34" charset="-122"/>
+                <a:cs typeface="Calibri" pitchFamily="34" charset="-120"/>
+              </a:rPr>
+              <a:t>Azure Gov / Azure ML · on-prem GPU</a:t>
+            </a:r>
+            <a:endParaRPr lang="en-US" sz="1100" dirty="0"/>
+          </a:p>
+        </p:txBody>
+      </p:sp>
+      <p:sp>
+        <p:nvSpPr>
+          <p:cNvPr id="39" name="Text 34"/>
+          <p:cNvSpPr/>
+          <p:nvPr/>
+        </p:nvSpPr>
+        <p:spPr>
+          <a:xfrm>
+            <a:off x="8458200" y="3840480"/>
+            <a:ext cx="2926080" cy="1645920"/>
+          </a:xfrm>
+          <a:prstGeom prst="rect">
+            <a:avLst/>
+          </a:prstGeom>
+          <a:noFill/>
+          <a:ln/>
+        </p:spPr>
+        <p:txBody>
+          <a:bodyPr wrap="square" lIns="0" tIns="0" rIns="0" bIns="0" rtlCol="0" anchor="ctr"/>
+          <a:lstStyle/>
+          <a:p>
+            <a:pPr indent="0" marL="0">
+              <a:buNone/>
+            </a:pPr>
+            <a:r>
+              <a:rPr lang="en-US" sz="1200" dirty="0">
+                <a:solidFill>
+                  <a:srgbClr val="1F2937"/>
+                </a:solidFill>
+                <a:latin typeface="Calibri" pitchFamily="34" charset="0"/>
+                <a:ea typeface="Calibri" pitchFamily="34" charset="-122"/>
+                <a:cs typeface="Calibri" pitchFamily="34" charset="-120"/>
+              </a:rPr>
+              <a:t>Same Docker image inside FedRAMP boundary. INFERENCE_MODE=sft loads the LoRA on agency GPU. Zero outbound calls. Rules engine identical. Production target.</a:t>
+            </a:r>
+            <a:endParaRPr lang="en-US" sz="1200" dirty="0"/>
+          </a:p>
+        </p:txBody>
+      </p:sp>
+      <p:sp>
+        <p:nvSpPr>
+          <p:cNvPr id="40" name="Shape 35"/>
+          <p:cNvSpPr/>
+          <p:nvPr/>
+        </p:nvSpPr>
+        <p:spPr>
+          <a:xfrm>
+            <a:off x="8458200" y="5577840"/>
+            <a:ext cx="2926080" cy="18288"/>
+          </a:xfrm>
+          <a:prstGeom prst="rect">
+            <a:avLst/>
+          </a:prstGeom>
+          <a:solidFill>
+            <a:srgbClr val="CADCFC"/>
+          </a:solidFill>
+          <a:ln w="12700">
+            <a:solidFill>
+              <a:srgbClr val="333333"/>
+            </a:solidFill>
+            <a:prstDash val="solid"/>
+          </a:ln>
+        </p:spPr>
+        <p:txBody>
+          <a:bodyPr/>
+          <a:p/>
+        </p:txBody>
+      </p:sp>
+      <p:sp>
+        <p:nvSpPr>
+          <p:cNvPr id="41" name="Text 36"/>
+          <p:cNvSpPr/>
+          <p:nvPr/>
+        </p:nvSpPr>
+        <p:spPr>
+          <a:xfrm>
+            <a:off x="8458200" y="5669280"/>
+            <a:ext cx="2926080" cy="201168"/>
+          </a:xfrm>
+          <a:prstGeom prst="rect">
+            <a:avLst/>
+          </a:prstGeom>
+          <a:noFill/>
+          <a:ln/>
+        </p:spPr>
+        <p:txBody>
+          <a:bodyPr wrap="square" lIns="0" tIns="0" rIns="0" bIns="0" rtlCol="0" anchor="ctr"/>
+          <a:lstStyle/>
+          <a:p>
+            <a:pPr indent="0" marL="0">
+              <a:buNone/>
+            </a:pPr>
+            <a:r>
+              <a:rPr lang="en-US" sz="900" b="1" spc="300" kern="0" dirty="0">
+                <a:solidFill>
+                  <a:srgbClr val="6B7280"/>
+                </a:solidFill>
+                <a:latin typeface="Calibri" pitchFamily="34" charset="0"/>
+                <a:ea typeface="Calibri" pitchFamily="34" charset="-122"/>
+                <a:cs typeface="Calibri" pitchFamily="34" charset="-120"/>
+              </a:rPr>
+              <a:t>Cost</a:t>
+            </a:r>
+            <a:endParaRPr lang="en-US" sz="900" dirty="0"/>
+          </a:p>
+        </p:txBody>
+      </p:sp>
+      <p:sp>
+        <p:nvSpPr>
+          <p:cNvPr id="42" name="Text 37"/>
+          <p:cNvSpPr/>
+          <p:nvPr/>
+        </p:nvSpPr>
+        <p:spPr>
+          <a:xfrm>
+            <a:off x="8458200" y="5852160"/>
+            <a:ext cx="2926080" cy="201168"/>
+          </a:xfrm>
+          <a:prstGeom prst="rect">
+            <a:avLst/>
+          </a:prstGeom>
+          <a:noFill/>
+          <a:ln/>
+        </p:spPr>
+        <p:txBody>
+          <a:bodyPr wrap="square" lIns="0" tIns="0" rIns="0" bIns="0" rtlCol="0" anchor="ctr"/>
+          <a:lstStyle/>
+          <a:p>
+            <a:pPr indent="0" marL="0">
+              <a:buNone/>
+            </a:pPr>
+            <a:r>
+              <a:rPr lang="en-US" sz="1100" dirty="0">
+                <a:solidFill>
+                  <a:srgbClr val="1F2937"/>
+                </a:solidFill>
+                <a:latin typeface="Calibri" pitchFamily="34" charset="0"/>
+                <a:ea typeface="Calibri" pitchFamily="34" charset="-122"/>
+                <a:cs typeface="Calibri" pitchFamily="34" charset="-120"/>
+              </a:rPr>
+              <a:t>Inside agency Azure spend</a:t>
+            </a:r>
+            <a:endParaRPr lang="en-US" sz="1100" dirty="0"/>
+          </a:p>
+        </p:txBody>
+      </p:sp>
+      <p:sp>
+        <p:nvSpPr>
+          <p:cNvPr id="43" name="Text 38"/>
+          <p:cNvSpPr/>
+          <p:nvPr/>
+        </p:nvSpPr>
+        <p:spPr>
+          <a:xfrm>
+            <a:off x="8458200" y="6062472"/>
+            <a:ext cx="2926080" cy="201168"/>
+          </a:xfrm>
+          <a:prstGeom prst="rect">
+            <a:avLst/>
+          </a:prstGeom>
+          <a:noFill/>
+          <a:ln/>
+        </p:spPr>
+        <p:txBody>
+          <a:bodyPr wrap="square" lIns="0" tIns="0" rIns="0" bIns="0" rtlCol="0" anchor="ctr"/>
+          <a:lstStyle/>
+          <a:p>
+            <a:pPr indent="0" marL="0">
+              <a:buNone/>
+            </a:pPr>
+            <a:r>
+              <a:rPr lang="en-US" sz="900" b="1" spc="300" kern="0" dirty="0">
+                <a:solidFill>
+                  <a:srgbClr val="6B7280"/>
+                </a:solidFill>
+                <a:latin typeface="Calibri" pitchFamily="34" charset="0"/>
+                <a:ea typeface="Calibri" pitchFamily="34" charset="-122"/>
+                <a:cs typeface="Calibri" pitchFamily="34" charset="-120"/>
+              </a:rPr>
+              <a:t>Privacy</a:t>
+            </a:r>
+            <a:endParaRPr lang="en-US" sz="900" dirty="0"/>
+          </a:p>
+        </p:txBody>
+      </p:sp>
+      <p:sp>
+        <p:nvSpPr>
+          <p:cNvPr id="44" name="Text 39"/>
+          <p:cNvSpPr/>
+          <p:nvPr/>
+        </p:nvSpPr>
+        <p:spPr>
+          <a:xfrm>
+            <a:off x="8458200" y="6245352"/>
+            <a:ext cx="2926080" cy="201168"/>
+          </a:xfrm>
+          <a:prstGeom prst="rect">
+            <a:avLst/>
+          </a:prstGeom>
+          <a:noFill/>
+          <a:ln/>
+        </p:spPr>
+        <p:txBody>
+          <a:bodyPr wrap="square" lIns="0" tIns="0" rIns="0" bIns="0" rtlCol="0" anchor="ctr"/>
+          <a:lstStyle/>
+          <a:p>
+            <a:pPr indent="0" marL="0">
+              <a:buNone/>
+            </a:pPr>
+            <a:r>
+              <a:rPr lang="en-US" sz="1100" dirty="0">
+                <a:solidFill>
+                  <a:srgbClr val="1F2937"/>
+                </a:solidFill>
+                <a:latin typeface="Calibri" pitchFamily="34" charset="0"/>
+                <a:ea typeface="Calibri" pitchFamily="34" charset="-122"/>
+                <a:cs typeface="Calibri" pitchFamily="34" charset="-120"/>
+              </a:rPr>
+              <a:t>FedRAMP High · IL4/5</a:t>
+            </a:r>
+            <a:endParaRPr lang="en-US" sz="1100" dirty="0"/>
+          </a:p>
+        </p:txBody>
+      </p:sp>
+      <p:sp>
+        <p:nvSpPr>
+          <p:cNvPr id="45" name="Text 40"/>
+          <p:cNvSpPr/>
+          <p:nvPr/>
+        </p:nvSpPr>
+        <p:spPr>
+          <a:xfrm>
+            <a:off x="502920" y="6446520"/>
+            <a:ext cx="11247120" cy="320040"/>
+          </a:xfrm>
+          <a:prstGeom prst="rect">
+            <a:avLst/>
+          </a:prstGeom>
+          <a:noFill/>
+          <a:ln/>
+        </p:spPr>
+        <p:txBody>
+          <a:bodyPr wrap="square" lIns="0" tIns="0" rIns="0" bIns="0" rtlCol="0" anchor="ctr"/>
+          <a:lstStyle/>
+          <a:p>
+            <a:pPr algn="ctr" indent="0" marL="0">
+              <a:buNone/>
+            </a:pPr>
+            <a:r>
+              <a:rPr lang="en-US" sz="1200" i="1" dirty="0">
+                <a:solidFill>
+                  <a:srgbClr val="6B7280"/>
+                </a:solidFill>
+                <a:latin typeface="Georgia" pitchFamily="34" charset="0"/>
+                <a:ea typeface="Georgia" pitchFamily="34" charset="-122"/>
+                <a:cs typeface="Georgia" pitchFamily="34" charset="-120"/>
+              </a:rPr>
+              <a:t>Swapping topology is one env var. The verifier code never changes.</a:t>
+            </a:r>
+            <a:endParaRPr lang="en-US" sz="1200" dirty="0"/>
+          </a:p>
+        </p:txBody>
+      </p:sp>
+    </p:spTree>
+  </p:cSld>
+  <p:clrMapOvr>
+    <a:masterClrMapping/>
+  </p:clrMapOvr>
+</p:sld>
+</file>
+
+<file path=ppt/slides/slide11.xml><?xml version="1.0" encoding="utf-8"?>
 <p:sld xmlns:a="http://schemas.openxmlformats.org/drawingml/2006/main" xmlns:r="http://schemas.openxmlformats.org/officeDocument/2006/relationships" xmlns:p="http://schemas.openxmlformats.org/presentationml/2006/main">
   <p:cSld name="Slide 10">
     <p:bg>
@@ -2680,6 +4299,10 @@
             <a:prstDash val="solid"/>
           </a:ln>
         </p:spPr>
+        <p:txBody>
+          <a:bodyPr/>
+          <a:p/>
+        </p:txBody>
       </p:sp>
       <p:sp>
         <p:nvSpPr>
@@ -2831,7 +4454,7 @@
                 <a:ea typeface="Calibri" pitchFamily="34" charset="-122"/>
                 <a:cs typeface="Calibri" pitchFamily="34" charset="-120"/>
               </a:rPr>
-              <a:t>10 / 12</a:t>
+              <a:t>11 / 13</a:t>
             </a:r>
             <a:endParaRPr lang="en-US" sz="900" dirty="0"/>
           </a:p>
@@ -2868,6 +4491,10 @@
             </a:outerShdw>
           </a:effectLst>
         </p:spPr>
+        <p:txBody>
+          <a:bodyPr/>
+          <a:p/>
+        </p:txBody>
       </p:sp>
       <p:sp>
         <p:nvSpPr>
@@ -2893,6 +4520,10 @@
             <a:prstDash val="solid"/>
           </a:ln>
         </p:spPr>
+        <p:txBody>
+          <a:bodyPr/>
+          <a:p/>
+        </p:txBody>
       </p:sp>
       <p:sp>
         <p:nvSpPr>
@@ -3173,6 +4804,10 @@
             </a:outerShdw>
           </a:effectLst>
         </p:spPr>
+        <p:txBody>
+          <a:bodyPr/>
+          <a:p/>
+        </p:txBody>
       </p:sp>
       <p:sp>
         <p:nvSpPr>
@@ -3198,6 +4833,10 @@
             <a:prstDash val="solid"/>
           </a:ln>
         </p:spPr>
+        <p:txBody>
+          <a:bodyPr/>
+          <a:p/>
+        </p:txBody>
       </p:sp>
       <p:sp>
         <p:nvSpPr>
@@ -3669,7 +5308,7 @@
 </p:sld>
 </file>
 
-<file path=ppt/slides/slide11.xml><?xml version="1.0" encoding="utf-8"?>
+<file path=ppt/slides/slide12.xml><?xml version="1.0" encoding="utf-8"?>
 <p:sld xmlns:a="http://schemas.openxmlformats.org/drawingml/2006/main" xmlns:r="http://schemas.openxmlformats.org/officeDocument/2006/relationships" xmlns:p="http://schemas.openxmlformats.org/presentationml/2006/main">
   <p:cSld name="Slide 11">
     <p:bg>
@@ -3717,6 +5356,10 @@
             <a:prstDash val="solid"/>
           </a:ln>
         </p:spPr>
+        <p:txBody>
+          <a:bodyPr/>
+          <a:p/>
+        </p:txBody>
       </p:sp>
       <p:sp>
         <p:nvSpPr>
@@ -3868,7 +5511,7 @@
                 <a:ea typeface="Calibri" pitchFamily="34" charset="-122"/>
                 <a:cs typeface="Calibri" pitchFamily="34" charset="-120"/>
               </a:rPr>
-              <a:t>11 / 12</a:t>
+              <a:t>12 / 13</a:t>
             </a:r>
             <a:endParaRPr lang="en-US" sz="900" dirty="0"/>
           </a:p>
@@ -3905,6 +5548,10 @@
             </a:outerShdw>
           </a:effectLst>
         </p:spPr>
+        <p:txBody>
+          <a:bodyPr/>
+          <a:p/>
+        </p:txBody>
       </p:sp>
       <p:sp>
         <p:nvSpPr>
@@ -3930,6 +5577,10 @@
             <a:prstDash val="solid"/>
           </a:ln>
         </p:spPr>
+        <p:txBody>
+          <a:bodyPr/>
+          <a:p/>
+        </p:txBody>
       </p:sp>
       <p:pic>
         <p:nvPicPr>
@@ -4064,6 +5715,10 @@
             </a:outerShdw>
           </a:effectLst>
         </p:spPr>
+        <p:txBody>
+          <a:bodyPr/>
+          <a:p/>
+        </p:txBody>
       </p:sp>
       <p:sp>
         <p:nvSpPr>
@@ -4089,6 +5744,10 @@
             <a:prstDash val="solid"/>
           </a:ln>
         </p:spPr>
+        <p:txBody>
+          <a:bodyPr/>
+          <a:p/>
+        </p:txBody>
       </p:sp>
       <p:pic>
         <p:nvPicPr>
@@ -4223,6 +5882,10 @@
             </a:outerShdw>
           </a:effectLst>
         </p:spPr>
+        <p:txBody>
+          <a:bodyPr/>
+          <a:p/>
+        </p:txBody>
       </p:sp>
       <p:sp>
         <p:nvSpPr>
@@ -4248,6 +5911,10 @@
             <a:prstDash val="solid"/>
           </a:ln>
         </p:spPr>
+        <p:txBody>
+          <a:bodyPr/>
+          <a:p/>
+        </p:txBody>
       </p:sp>
       <p:pic>
         <p:nvPicPr>
@@ -4382,6 +6049,10 @@
             </a:outerShdw>
           </a:effectLst>
         </p:spPr>
+        <p:txBody>
+          <a:bodyPr/>
+          <a:p/>
+        </p:txBody>
       </p:sp>
       <p:sp>
         <p:nvSpPr>
@@ -4407,6 +6078,10 @@
             <a:prstDash val="solid"/>
           </a:ln>
         </p:spPr>
+        <p:txBody>
+          <a:bodyPr/>
+          <a:p/>
+        </p:txBody>
       </p:sp>
       <p:pic>
         <p:nvPicPr>
@@ -4518,7 +6193,7 @@
 </p:sld>
 </file>
 
-<file path=ppt/slides/slide12.xml><?xml version="1.0" encoding="utf-8"?>
+<file path=ppt/slides/slide13.xml><?xml version="1.0" encoding="utf-8"?>
 <p:sld xmlns:a="http://schemas.openxmlformats.org/drawingml/2006/main" xmlns:r="http://schemas.openxmlformats.org/officeDocument/2006/relationships" xmlns:p="http://schemas.openxmlformats.org/presentationml/2006/main">
   <p:cSld name="Slide 12">
     <p:bg>
@@ -4566,6 +6241,10 @@
             <a:prstDash val="solid"/>
           </a:ln>
         </p:spPr>
+        <p:txBody>
+          <a:bodyPr/>
+          <a:p/>
+        </p:txBody>
       </p:sp>
       <p:sp>
         <p:nvSpPr>
@@ -4669,6 +6348,10 @@
             <a:prstDash val="solid"/>
           </a:ln>
         </p:spPr>
+        <p:txBody>
+          <a:bodyPr/>
+          <a:p/>
+        </p:txBody>
       </p:sp>
       <p:sp>
         <p:nvSpPr>
@@ -4811,6 +6494,10 @@
             <a:prstDash val="solid"/>
           </a:ln>
         </p:spPr>
+        <p:txBody>
+          <a:bodyPr/>
+          <a:p/>
+        </p:txBody>
       </p:sp>
       <p:sp>
         <p:nvSpPr>
@@ -4953,6 +6640,10 @@
             <a:prstDash val="solid"/>
           </a:ln>
         </p:spPr>
+        <p:txBody>
+          <a:bodyPr/>
+          <a:p/>
+        </p:txBody>
       </p:sp>
       <p:sp>
         <p:nvSpPr>
@@ -5205,6 +6896,10 @@
             <a:prstDash val="solid"/>
           </a:ln>
         </p:spPr>
+        <p:txBody>
+          <a:bodyPr/>
+          <a:p/>
+        </p:txBody>
       </p:sp>
       <p:sp>
         <p:nvSpPr>
@@ -5356,7 +7051,7 @@
                 <a:ea typeface="Calibri" pitchFamily="34" charset="-122"/>
                 <a:cs typeface="Calibri" pitchFamily="34" charset="-120"/>
               </a:rPr>
-              <a:t>2 / 12</a:t>
+              <a:t>2 / 13</a:t>
             </a:r>
             <a:endParaRPr lang="en-US" sz="900" dirty="0"/>
           </a:p>
@@ -5580,6 +7275,10 @@
             </a:outerShdw>
           </a:effectLst>
         </p:spPr>
+        <p:txBody>
+          <a:bodyPr/>
+          <a:p/>
+        </p:txBody>
       </p:sp>
       <p:sp>
         <p:nvSpPr>
@@ -5605,6 +7304,10 @@
             <a:prstDash val="solid"/>
           </a:ln>
         </p:spPr>
+        <p:txBody>
+          <a:bodyPr/>
+          <a:p/>
+        </p:txBody>
       </p:sp>
       <p:pic>
         <p:nvPicPr>
@@ -5739,6 +7442,10 @@
             </a:outerShdw>
           </a:effectLst>
         </p:spPr>
+        <p:txBody>
+          <a:bodyPr/>
+          <a:p/>
+        </p:txBody>
       </p:sp>
       <p:sp>
         <p:nvSpPr>
@@ -5764,6 +7471,10 @@
             <a:prstDash val="solid"/>
           </a:ln>
         </p:spPr>
+        <p:txBody>
+          <a:bodyPr/>
+          <a:p/>
+        </p:txBody>
       </p:sp>
       <p:pic>
         <p:nvPicPr>
@@ -5898,6 +7609,10 @@
             </a:outerShdw>
           </a:effectLst>
         </p:spPr>
+        <p:txBody>
+          <a:bodyPr/>
+          <a:p/>
+        </p:txBody>
       </p:sp>
       <p:sp>
         <p:nvSpPr>
@@ -5923,6 +7638,10 @@
             <a:prstDash val="solid"/>
           </a:ln>
         </p:spPr>
+        <p:txBody>
+          <a:bodyPr/>
+          <a:p/>
+        </p:txBody>
       </p:sp>
       <p:pic>
         <p:nvPicPr>
@@ -6082,6 +7801,10 @@
             <a:prstDash val="solid"/>
           </a:ln>
         </p:spPr>
+        <p:txBody>
+          <a:bodyPr/>
+          <a:p/>
+        </p:txBody>
       </p:sp>
       <p:sp>
         <p:nvSpPr>
@@ -6233,7 +7956,7 @@
                 <a:ea typeface="Calibri" pitchFamily="34" charset="-122"/>
                 <a:cs typeface="Calibri" pitchFamily="34" charset="-120"/>
               </a:rPr>
-              <a:t>3 / 12</a:t>
+              <a:t>3 / 13</a:t>
             </a:r>
             <a:endParaRPr lang="en-US" sz="900" dirty="0"/>
           </a:p>
@@ -6270,6 +7993,10 @@
             </a:outerShdw>
           </a:effectLst>
         </p:spPr>
+        <p:txBody>
+          <a:bodyPr/>
+          <a:p/>
+        </p:txBody>
       </p:sp>
       <p:sp>
         <p:nvSpPr>
@@ -6295,6 +8022,10 @@
             <a:prstDash val="solid"/>
           </a:ln>
         </p:spPr>
+        <p:txBody>
+          <a:bodyPr/>
+          <a:p/>
+        </p:txBody>
       </p:sp>
       <p:pic>
         <p:nvPicPr>
@@ -6507,6 +8238,10 @@
             </a:outerShdw>
           </a:effectLst>
         </p:spPr>
+        <p:txBody>
+          <a:bodyPr/>
+          <a:p/>
+        </p:txBody>
       </p:sp>
       <p:sp>
         <p:nvSpPr>
@@ -6532,6 +8267,10 @@
             <a:prstDash val="solid"/>
           </a:ln>
         </p:spPr>
+        <p:txBody>
+          <a:bodyPr/>
+          <a:p/>
+        </p:txBody>
       </p:sp>
       <p:pic>
         <p:nvPicPr>
@@ -6744,6 +8483,10 @@
             </a:outerShdw>
           </a:effectLst>
         </p:spPr>
+        <p:txBody>
+          <a:bodyPr/>
+          <a:p/>
+        </p:txBody>
       </p:sp>
       <p:sp>
         <p:nvSpPr>
@@ -6769,6 +8512,10 @@
             <a:prstDash val="solid"/>
           </a:ln>
         </p:spPr>
+        <p:txBody>
+          <a:bodyPr/>
+          <a:p/>
+        </p:txBody>
       </p:sp>
       <p:pic>
         <p:nvPicPr>
@@ -7045,6 +8792,10 @@
             <a:prstDash val="solid"/>
           </a:ln>
         </p:spPr>
+        <p:txBody>
+          <a:bodyPr/>
+          <a:p/>
+        </p:txBody>
       </p:sp>
       <p:sp>
         <p:nvSpPr>
@@ -7196,7 +8947,7 @@
                 <a:ea typeface="Calibri" pitchFamily="34" charset="-122"/>
                 <a:cs typeface="Calibri" pitchFamily="34" charset="-120"/>
               </a:rPr>
-              <a:t>4 / 12</a:t>
+              <a:t>4 / 13</a:t>
             </a:r>
             <a:endParaRPr lang="en-US" sz="900" dirty="0"/>
           </a:p>
@@ -7233,6 +8984,10 @@
             </a:outerShdw>
           </a:effectLst>
         </p:spPr>
+        <p:txBody>
+          <a:bodyPr/>
+          <a:p/>
+        </p:txBody>
       </p:sp>
       <p:pic>
         <p:nvPicPr>
@@ -7391,6 +9146,10 @@
             </a:outerShdw>
           </a:effectLst>
         </p:spPr>
+        <p:txBody>
+          <a:bodyPr/>
+          <a:p/>
+        </p:txBody>
       </p:sp>
       <p:pic>
         <p:nvPicPr>
@@ -7549,6 +9308,10 @@
             </a:outerShdw>
           </a:effectLst>
         </p:spPr>
+        <p:txBody>
+          <a:bodyPr/>
+          <a:p/>
+        </p:txBody>
       </p:sp>
       <p:pic>
         <p:nvPicPr>
@@ -7707,6 +9470,10 @@
             </a:outerShdw>
           </a:effectLst>
         </p:spPr>
+        <p:txBody>
+          <a:bodyPr/>
+          <a:p/>
+        </p:txBody>
       </p:sp>
       <p:pic>
         <p:nvPicPr>
@@ -7865,6 +9632,10 @@
             </a:outerShdw>
           </a:effectLst>
         </p:spPr>
+        <p:txBody>
+          <a:bodyPr/>
+          <a:p/>
+        </p:txBody>
       </p:sp>
       <p:pic>
         <p:nvPicPr>
@@ -8033,6 +9804,10 @@
             <a:prstDash val="solid"/>
           </a:ln>
         </p:spPr>
+        <p:txBody>
+          <a:bodyPr/>
+          <a:p/>
+        </p:txBody>
       </p:sp>
       <p:sp>
         <p:nvSpPr>
@@ -8058,6 +9833,10 @@
             <a:prstDash val="solid"/>
           </a:ln>
         </p:spPr>
+        <p:txBody>
+          <a:bodyPr/>
+          <a:p/>
+        </p:txBody>
       </p:sp>
       <p:sp>
         <p:nvSpPr>
@@ -8163,6 +9942,10 @@
             <a:prstDash val="solid"/>
           </a:ln>
         </p:spPr>
+        <p:txBody>
+          <a:bodyPr/>
+          <a:p/>
+        </p:txBody>
       </p:sp>
       <p:sp>
         <p:nvSpPr>
@@ -8188,6 +9971,10 @@
             <a:prstDash val="solid"/>
           </a:ln>
         </p:spPr>
+        <p:txBody>
+          <a:bodyPr/>
+          <a:p/>
+        </p:txBody>
       </p:sp>
       <p:sp>
         <p:nvSpPr>
@@ -8293,6 +10080,10 @@
             <a:prstDash val="solid"/>
           </a:ln>
         </p:spPr>
+        <p:txBody>
+          <a:bodyPr/>
+          <a:p/>
+        </p:txBody>
       </p:sp>
       <p:sp>
         <p:nvSpPr>
@@ -8318,6 +10109,10 @@
             <a:prstDash val="solid"/>
           </a:ln>
         </p:spPr>
+        <p:txBody>
+          <a:bodyPr/>
+          <a:p/>
+        </p:txBody>
       </p:sp>
       <p:sp>
         <p:nvSpPr>
@@ -8423,6 +10218,10 @@
             <a:prstDash val="solid"/>
           </a:ln>
         </p:spPr>
+        <p:txBody>
+          <a:bodyPr/>
+          <a:p/>
+        </p:txBody>
       </p:sp>
       <p:sp>
         <p:nvSpPr>
@@ -8448,6 +10247,10 @@
             <a:prstDash val="solid"/>
           </a:ln>
         </p:spPr>
+        <p:txBody>
+          <a:bodyPr/>
+          <a:p/>
+        </p:txBody>
       </p:sp>
       <p:sp>
         <p:nvSpPr>
@@ -8553,6 +10356,10 @@
             <a:prstDash val="solid"/>
           </a:ln>
         </p:spPr>
+        <p:txBody>
+          <a:bodyPr/>
+          <a:p/>
+        </p:txBody>
       </p:sp>
       <p:sp>
         <p:nvSpPr>
@@ -8578,6 +10385,10 @@
             <a:prstDash val="solid"/>
           </a:ln>
         </p:spPr>
+        <p:txBody>
+          <a:bodyPr/>
+          <a:p/>
+        </p:txBody>
       </p:sp>
       <p:sp>
         <p:nvSpPr>
@@ -8683,6 +10494,10 @@
             <a:prstDash val="solid"/>
           </a:ln>
         </p:spPr>
+        <p:txBody>
+          <a:bodyPr/>
+          <a:p/>
+        </p:txBody>
       </p:sp>
       <p:sp>
         <p:nvSpPr>
@@ -8708,6 +10523,10 @@
             <a:prstDash val="solid"/>
           </a:ln>
         </p:spPr>
+        <p:txBody>
+          <a:bodyPr/>
+          <a:p/>
+        </p:txBody>
       </p:sp>
       <p:sp>
         <p:nvSpPr>
@@ -8796,6 +10615,1116 @@
 </file>
 
 <file path=ppt/slides/slide5.xml><?xml version="1.0" encoding="utf-8"?>
+<p:sld xmlns:a="http://schemas.openxmlformats.org/drawingml/2006/main" xmlns:p="http://schemas.openxmlformats.org/presentationml/2006/main" xmlns:r="http://schemas.openxmlformats.org/officeDocument/2006/relationships">
+  <p:cSld>
+    <p:spTree>
+      <p:nvGrpSpPr>
+        <p:cNvPr id="1" name=""/>
+        <p:cNvGrpSpPr/>
+        <p:nvPr/>
+      </p:nvGrpSpPr>
+      <p:grpSpPr/>
+      <p:sp>
+        <p:nvSpPr>
+          <p:cNvPr id="2" name="TextBox 1"/>
+          <p:cNvSpPr txBox="1"/>
+          <p:nvPr/>
+        </p:nvSpPr>
+        <p:spPr>
+          <a:xfrm>
+            <a:off x="502920" y="320040"/>
+            <a:ext cx="11186160" cy="274320"/>
+          </a:xfrm>
+          <a:prstGeom prst="rect">
+            <a:avLst/>
+          </a:prstGeom>
+          <a:noFill/>
+        </p:spPr>
+        <p:txBody>
+          <a:bodyPr wrap="square" lIns="0" rIns="0" tIns="0" bIns="0">
+            <a:spAutoFit/>
+          </a:bodyPr>
+          <a:lstStyle/>
+          <a:p>
+            <a:pPr algn="l"/>
+            <a:r>
+              <a:rPr sz="1100" b="1">
+                <a:solidFill>
+                  <a:srgbClr val="4F46E5"/>
+                </a:solidFill>
+              </a:rPr>
+              <a:t>SECTION 3.5 · PRODUCTION ARCHITECTURE</a:t>
+            </a:r>
+          </a:p>
+        </p:txBody>
+      </p:sp>
+      <p:sp>
+        <p:nvSpPr>
+          <p:cNvPr id="3" name="TextBox 2"/>
+          <p:cNvSpPr txBox="1"/>
+          <p:nvPr/>
+        </p:nvSpPr>
+        <p:spPr>
+          <a:xfrm>
+            <a:off x="502920" y="594360"/>
+            <a:ext cx="11186160" cy="502920"/>
+          </a:xfrm>
+          <a:prstGeom prst="rect">
+            <a:avLst/>
+          </a:prstGeom>
+          <a:noFill/>
+        </p:spPr>
+        <p:txBody>
+          <a:bodyPr wrap="square" lIns="0" rIns="0" tIns="0" bIns="0">
+            <a:spAutoFit/>
+          </a:bodyPr>
+          <a:lstStyle/>
+          <a:p>
+            <a:pPr algn="l"/>
+            <a:r>
+              <a:rPr sz="2200" b="1">
+                <a:solidFill>
+                  <a:srgbClr val="111111"/>
+                </a:solidFill>
+              </a:rPr>
+              <a:t>Three-way parallel fan-out — Qwen on our boundary, Haiku for public text</a:t>
+            </a:r>
+          </a:p>
+        </p:txBody>
+      </p:sp>
+      <p:sp>
+        <p:nvSpPr>
+          <p:cNvPr id="4" name="TextBox 3"/>
+          <p:cNvSpPr txBox="1"/>
+          <p:nvPr/>
+        </p:nvSpPr>
+        <p:spPr>
+          <a:xfrm>
+            <a:off x="502920" y="1143000"/>
+            <a:ext cx="11186160" cy="365760"/>
+          </a:xfrm>
+          <a:prstGeom prst="rect">
+            <a:avLst/>
+          </a:prstGeom>
+          <a:noFill/>
+        </p:spPr>
+        <p:txBody>
+          <a:bodyPr wrap="square" lIns="0" rIns="0" tIns="0" bIns="0">
+            <a:spAutoFit/>
+          </a:bodyPr>
+          <a:lstStyle/>
+          <a:p>
+            <a:pPr algn="l"/>
+            <a:r>
+              <a:rPr sz="1200" b="0">
+                <a:solidFill>
+                  <a:srgbClr val="555555"/>
+                </a:solidFill>
+              </a:rPr>
+              <a:t>One Vercel function · three concurrent observation sources via asyncio.gather · deterministic rules engine · ~5 s warm</a:t>
+            </a:r>
+          </a:p>
+        </p:txBody>
+      </p:sp>
+      <p:sp>
+        <p:nvSpPr>
+          <p:cNvPr id="5" name="Rounded Rectangle 4"/>
+          <p:cNvSpPr/>
+          <p:nvPr/>
+        </p:nvSpPr>
+        <p:spPr>
+          <a:xfrm>
+            <a:off x="502920" y="1691640"/>
+            <a:ext cx="3594608" cy="3108960"/>
+          </a:xfrm>
+          <a:prstGeom prst="roundRect">
+            <a:avLst>
+              <a:gd name="adj" fmla="val 6000"/>
+            </a:avLst>
+          </a:prstGeom>
+          <a:solidFill>
+            <a:srgbClr val="F9FAFB"/>
+          </a:solidFill>
+          <a:ln w="19050">
+            <a:solidFill>
+              <a:srgbClr val="2563EB"/>
+            </a:solidFill>
+          </a:ln>
+        </p:spPr>
+        <p:style>
+          <a:lnRef idx="1">
+            <a:schemeClr val="accent1"/>
+          </a:lnRef>
+          <a:fillRef idx="3">
+            <a:schemeClr val="accent1"/>
+          </a:fillRef>
+          <a:effectRef idx="2">
+            <a:schemeClr val="accent1"/>
+          </a:effectRef>
+          <a:fontRef idx="minor">
+            <a:schemeClr val="lt1"/>
+          </a:fontRef>
+        </p:style>
+        <p:txBody>
+          <a:bodyPr rtlCol="0" anchor="ctr"/>
+          <a:lstStyle/>
+          <a:p/>
+        </p:txBody>
+      </p:sp>
+      <p:sp>
+        <p:nvSpPr>
+          <p:cNvPr id="6" name="Rounded Rectangle 5"/>
+          <p:cNvSpPr/>
+          <p:nvPr/>
+        </p:nvSpPr>
+        <p:spPr>
+          <a:xfrm>
+            <a:off x="502920" y="1691640"/>
+            <a:ext cx="3594608" cy="137160"/>
+          </a:xfrm>
+          <a:prstGeom prst="roundRect">
+            <a:avLst>
+              <a:gd name="adj" fmla="val 6000"/>
+            </a:avLst>
+          </a:prstGeom>
+          <a:solidFill>
+            <a:srgbClr val="2563EB"/>
+          </a:solidFill>
+          <a:ln>
+            <a:solidFill>
+              <a:srgbClr val="2563EB"/>
+            </a:solidFill>
+          </a:ln>
+        </p:spPr>
+        <p:style>
+          <a:lnRef idx="1">
+            <a:schemeClr val="accent1"/>
+          </a:lnRef>
+          <a:fillRef idx="3">
+            <a:schemeClr val="accent1"/>
+          </a:fillRef>
+          <a:effectRef idx="2">
+            <a:schemeClr val="accent1"/>
+          </a:effectRef>
+          <a:fontRef idx="minor">
+            <a:schemeClr val="lt1"/>
+          </a:fontRef>
+        </p:style>
+        <p:txBody>
+          <a:bodyPr rtlCol="0" anchor="ctr"/>
+          <a:lstStyle/>
+          <a:p/>
+        </p:txBody>
+      </p:sp>
+      <p:sp>
+        <p:nvSpPr>
+          <p:cNvPr id="7" name="TextBox 6"/>
+          <p:cNvSpPr txBox="1"/>
+          <p:nvPr/>
+        </p:nvSpPr>
+        <p:spPr>
+          <a:xfrm>
+            <a:off x="667512" y="1965960"/>
+            <a:ext cx="3265424" cy="384048"/>
+          </a:xfrm>
+          <a:prstGeom prst="rect">
+            <a:avLst/>
+          </a:prstGeom>
+          <a:noFill/>
+        </p:spPr>
+        <p:txBody>
+          <a:bodyPr wrap="square" lIns="0" rIns="0" tIns="0" bIns="0">
+            <a:spAutoFit/>
+          </a:bodyPr>
+          <a:lstStyle/>
+          <a:p>
+            <a:pPr algn="l"/>
+            <a:r>
+              <a:rPr sz="1500" b="1">
+                <a:solidFill>
+                  <a:srgbClr val="111111"/>
+                </a:solidFill>
+              </a:rPr>
+              <a:t>Modal Qwen v2 LoRA</a:t>
+            </a:r>
+          </a:p>
+        </p:txBody>
+      </p:sp>
+      <p:sp>
+        <p:nvSpPr>
+          <p:cNvPr id="8" name="TextBox 7"/>
+          <p:cNvSpPr txBox="1"/>
+          <p:nvPr/>
+        </p:nvSpPr>
+        <p:spPr>
+          <a:xfrm>
+            <a:off x="667512" y="2350008"/>
+            <a:ext cx="3265424" cy="292608"/>
+          </a:xfrm>
+          <a:prstGeom prst="rect">
+            <a:avLst/>
+          </a:prstGeom>
+          <a:noFill/>
+        </p:spPr>
+        <p:txBody>
+          <a:bodyPr wrap="square" lIns="0" rIns="0" tIns="0" bIns="0">
+            <a:spAutoFit/>
+          </a:bodyPr>
+          <a:lstStyle/>
+          <a:p>
+            <a:pPr algn="l"/>
+            <a:r>
+              <a:rPr sz="1000" b="0">
+                <a:solidFill>
+                  <a:srgbClr val="6B7280"/>
+                </a:solidFill>
+              </a:rPr>
+              <a:t>4 PII fields · privacy boundary</a:t>
+            </a:r>
+          </a:p>
+        </p:txBody>
+      </p:sp>
+      <p:sp>
+        <p:nvSpPr>
+          <p:cNvPr id="9" name="TextBox 8"/>
+          <p:cNvSpPr txBox="1"/>
+          <p:nvPr/>
+        </p:nvSpPr>
+        <p:spPr>
+          <a:xfrm>
+            <a:off x="667512" y="2770632"/>
+            <a:ext cx="3265424" cy="1188720"/>
+          </a:xfrm>
+          <a:prstGeom prst="rect">
+            <a:avLst/>
+          </a:prstGeom>
+          <a:noFill/>
+        </p:spPr>
+        <p:txBody>
+          <a:bodyPr wrap="square" lIns="0" rIns="0" tIns="0" bIns="0">
+            <a:spAutoFit/>
+          </a:bodyPr>
+          <a:lstStyle/>
+          <a:p>
+            <a:pPr algn="l"/>
+            <a:r>
+              <a:rPr sz="1100" b="1">
+                <a:solidFill>
+                  <a:srgbClr val="111111"/>
+                </a:solidFill>
+              </a:rPr>
+              <a:t>• Brand name</a:t>
+            </a:r>
+          </a:p>
+          <a:p>
+            <a:pPr algn="l"/>
+            <a:r>
+              <a:rPr sz="1100" b="1">
+                <a:solidFill>
+                  <a:srgbClr val="111111"/>
+                </a:solidFill>
+              </a:rPr>
+              <a:t>• Class &amp; type</a:t>
+            </a:r>
+          </a:p>
+          <a:p>
+            <a:pPr algn="l"/>
+            <a:r>
+              <a:rPr sz="1100" b="1">
+                <a:solidFill>
+                  <a:srgbClr val="111111"/>
+                </a:solidFill>
+              </a:rPr>
+              <a:t>• Bottler name/address</a:t>
+            </a:r>
+          </a:p>
+          <a:p>
+            <a:pPr algn="l"/>
+            <a:r>
+              <a:rPr sz="1100" b="1">
+                <a:solidFill>
+                  <a:srgbClr val="111111"/>
+                </a:solidFill>
+              </a:rPr>
+              <a:t>• Country of origin</a:t>
+            </a:r>
+          </a:p>
+        </p:txBody>
+      </p:sp>
+      <p:sp>
+        <p:nvSpPr>
+          <p:cNvPr id="10" name="TextBox 9"/>
+          <p:cNvSpPr txBox="1"/>
+          <p:nvPr/>
+        </p:nvSpPr>
+        <p:spPr>
+          <a:xfrm>
+            <a:off x="667512" y="4023360"/>
+            <a:ext cx="3265424" cy="777240"/>
+          </a:xfrm>
+          <a:prstGeom prst="rect">
+            <a:avLst/>
+          </a:prstGeom>
+          <a:noFill/>
+        </p:spPr>
+        <p:txBody>
+          <a:bodyPr wrap="square" lIns="0" rIns="0" tIns="0" bIns="0">
+            <a:spAutoFit/>
+          </a:bodyPr>
+          <a:lstStyle/>
+          <a:p>
+            <a:pPr algn="l"/>
+            <a:r>
+              <a:rPr sz="900" b="0">
+                <a:solidFill>
+                  <a:srgbClr val="4B5563"/>
+                </a:solidFill>
+              </a:rPr>
+              <a:t>Qwen2.5-VL-7B + LoRA r=16, BF16</a:t>
+            </a:r>
+          </a:p>
+          <a:p>
+            <a:pPr algn="l"/>
+            <a:r>
+              <a:rPr sz="900" b="0">
+                <a:solidFill>
+                  <a:srgbClr val="4B5563"/>
+                </a:solidFill>
+              </a:rPr>
+              <a:t>Trained on N=8,968 TTB labels (3 ep.)</a:t>
+            </a:r>
+          </a:p>
+          <a:p>
+            <a:pPr algn="l"/>
+            <a:r>
+              <a:rPr sz="900" b="0">
+                <a:solidFill>
+                  <a:srgbClr val="4B5563"/>
+                </a:solidFill>
+              </a:rPr>
+              <a:t>A100 GPU on a container we control</a:t>
+            </a:r>
+          </a:p>
+          <a:p>
+            <a:pPr algn="l"/>
+            <a:r>
+              <a:rPr sz="900" b="0">
+                <a:solidFill>
+                  <a:srgbClr val="4B5563"/>
+                </a:solidFill>
+              </a:rPr>
+              <a:t>Warm: ~4 s · Cold: 30-60 s</a:t>
+            </a:r>
+          </a:p>
+        </p:txBody>
+      </p:sp>
+      <p:sp>
+        <p:nvSpPr>
+          <p:cNvPr id="11" name="Rounded Rectangle 10"/>
+          <p:cNvSpPr/>
+          <p:nvPr/>
+        </p:nvSpPr>
+        <p:spPr>
+          <a:xfrm>
+            <a:off x="4298696" y="1691640"/>
+            <a:ext cx="3594608" cy="3108960"/>
+          </a:xfrm>
+          <a:prstGeom prst="roundRect">
+            <a:avLst>
+              <a:gd name="adj" fmla="val 6000"/>
+            </a:avLst>
+          </a:prstGeom>
+          <a:solidFill>
+            <a:srgbClr val="F9FAFB"/>
+          </a:solidFill>
+          <a:ln w="19050">
+            <a:solidFill>
+              <a:srgbClr val="DC2626"/>
+            </a:solidFill>
+          </a:ln>
+        </p:spPr>
+        <p:style>
+          <a:lnRef idx="1">
+            <a:schemeClr val="accent1"/>
+          </a:lnRef>
+          <a:fillRef idx="3">
+            <a:schemeClr val="accent1"/>
+          </a:fillRef>
+          <a:effectRef idx="2">
+            <a:schemeClr val="accent1"/>
+          </a:effectRef>
+          <a:fontRef idx="minor">
+            <a:schemeClr val="lt1"/>
+          </a:fontRef>
+        </p:style>
+        <p:txBody>
+          <a:bodyPr rtlCol="0" anchor="ctr"/>
+          <a:lstStyle/>
+          <a:p/>
+        </p:txBody>
+      </p:sp>
+      <p:sp>
+        <p:nvSpPr>
+          <p:cNvPr id="12" name="Rounded Rectangle 11"/>
+          <p:cNvSpPr/>
+          <p:nvPr/>
+        </p:nvSpPr>
+        <p:spPr>
+          <a:xfrm>
+            <a:off x="4298696" y="1691640"/>
+            <a:ext cx="3594608" cy="137160"/>
+          </a:xfrm>
+          <a:prstGeom prst="roundRect">
+            <a:avLst>
+              <a:gd name="adj" fmla="val 6000"/>
+            </a:avLst>
+          </a:prstGeom>
+          <a:solidFill>
+            <a:srgbClr val="DC2626"/>
+          </a:solidFill>
+          <a:ln>
+            <a:solidFill>
+              <a:srgbClr val="DC2626"/>
+            </a:solidFill>
+          </a:ln>
+        </p:spPr>
+        <p:style>
+          <a:lnRef idx="1">
+            <a:schemeClr val="accent1"/>
+          </a:lnRef>
+          <a:fillRef idx="3">
+            <a:schemeClr val="accent1"/>
+          </a:fillRef>
+          <a:effectRef idx="2">
+            <a:schemeClr val="accent1"/>
+          </a:effectRef>
+          <a:fontRef idx="minor">
+            <a:schemeClr val="lt1"/>
+          </a:fontRef>
+        </p:style>
+        <p:txBody>
+          <a:bodyPr rtlCol="0" anchor="ctr"/>
+          <a:lstStyle/>
+          <a:p/>
+        </p:txBody>
+      </p:sp>
+      <p:sp>
+        <p:nvSpPr>
+          <p:cNvPr id="13" name="TextBox 12"/>
+          <p:cNvSpPr txBox="1"/>
+          <p:nvPr/>
+        </p:nvSpPr>
+        <p:spPr>
+          <a:xfrm>
+            <a:off x="4463288" y="1965960"/>
+            <a:ext cx="3265424" cy="384048"/>
+          </a:xfrm>
+          <a:prstGeom prst="rect">
+            <a:avLst/>
+          </a:prstGeom>
+          <a:noFill/>
+        </p:spPr>
+        <p:txBody>
+          <a:bodyPr wrap="square" lIns="0" rIns="0" tIns="0" bIns="0">
+            <a:spAutoFit/>
+          </a:bodyPr>
+          <a:lstStyle/>
+          <a:p>
+            <a:pPr algn="l"/>
+            <a:r>
+              <a:rPr sz="1500" b="1">
+                <a:solidFill>
+                  <a:srgbClr val="111111"/>
+                </a:solidFill>
+              </a:rPr>
+              <a:t>Anthropic Haiku 4.5</a:t>
+            </a:r>
+          </a:p>
+        </p:txBody>
+      </p:sp>
+      <p:sp>
+        <p:nvSpPr>
+          <p:cNvPr id="14" name="TextBox 13"/>
+          <p:cNvSpPr txBox="1"/>
+          <p:nvPr/>
+        </p:nvSpPr>
+        <p:spPr>
+          <a:xfrm>
+            <a:off x="4463288" y="2350008"/>
+            <a:ext cx="3265424" cy="292608"/>
+          </a:xfrm>
+          <a:prstGeom prst="rect">
+            <a:avLst/>
+          </a:prstGeom>
+          <a:noFill/>
+        </p:spPr>
+        <p:txBody>
+          <a:bodyPr wrap="square" lIns="0" rIns="0" tIns="0" bIns="0">
+            <a:spAutoFit/>
+          </a:bodyPr>
+          <a:lstStyle/>
+          <a:p>
+            <a:pPr algn="l"/>
+            <a:r>
+              <a:rPr sz="1000" b="0">
+                <a:solidFill>
+                  <a:srgbClr val="6B7280"/>
+                </a:solidFill>
+              </a:rPr>
+              <a:t>3 public-text fields · commodity</a:t>
+            </a:r>
+          </a:p>
+        </p:txBody>
+      </p:sp>
+      <p:sp>
+        <p:nvSpPr>
+          <p:cNvPr id="15" name="TextBox 14"/>
+          <p:cNvSpPr txBox="1"/>
+          <p:nvPr/>
+        </p:nvSpPr>
+        <p:spPr>
+          <a:xfrm>
+            <a:off x="4463288" y="2770632"/>
+            <a:ext cx="3265424" cy="1188720"/>
+          </a:xfrm>
+          <a:prstGeom prst="rect">
+            <a:avLst/>
+          </a:prstGeom>
+          <a:noFill/>
+        </p:spPr>
+        <p:txBody>
+          <a:bodyPr wrap="square" lIns="0" rIns="0" tIns="0" bIns="0">
+            <a:spAutoFit/>
+          </a:bodyPr>
+          <a:lstStyle/>
+          <a:p>
+            <a:pPr algn="l"/>
+            <a:r>
+              <a:rPr sz="1100" b="1">
+                <a:solidFill>
+                  <a:srgbClr val="111111"/>
+                </a:solidFill>
+              </a:rPr>
+              <a:t>• Alcohol content</a:t>
+            </a:r>
+          </a:p>
+          <a:p>
+            <a:pPr algn="l"/>
+            <a:r>
+              <a:rPr sz="1100" b="1">
+                <a:solidFill>
+                  <a:srgbClr val="111111"/>
+                </a:solidFill>
+              </a:rPr>
+              <a:t>• Net contents</a:t>
+            </a:r>
+          </a:p>
+          <a:p>
+            <a:pPr algn="l"/>
+            <a:r>
+              <a:rPr sz="1100" b="1">
+                <a:solidFill>
+                  <a:srgbClr val="111111"/>
+                </a:solidFill>
+              </a:rPr>
+              <a:t>• Government Warning text + casing</a:t>
+            </a:r>
+          </a:p>
+        </p:txBody>
+      </p:sp>
+      <p:sp>
+        <p:nvSpPr>
+          <p:cNvPr id="16" name="TextBox 15"/>
+          <p:cNvSpPr txBox="1"/>
+          <p:nvPr/>
+        </p:nvSpPr>
+        <p:spPr>
+          <a:xfrm>
+            <a:off x="4463288" y="4023360"/>
+            <a:ext cx="3265424" cy="777240"/>
+          </a:xfrm>
+          <a:prstGeom prst="rect">
+            <a:avLst/>
+          </a:prstGeom>
+          <a:noFill/>
+        </p:spPr>
+        <p:txBody>
+          <a:bodyPr wrap="square" lIns="0" rIns="0" tIns="0" bIns="0">
+            <a:spAutoFit/>
+          </a:bodyPr>
+          <a:lstStyle/>
+          <a:p>
+            <a:pPr algn="l"/>
+            <a:r>
+              <a:rPr sz="900" b="0">
+                <a:solidFill>
+                  <a:srgbClr val="4B5563"/>
+                </a:solidFill>
+              </a:rPr>
+              <a:t>Tool-use structured extraction</a:t>
+            </a:r>
+          </a:p>
+          <a:p>
+            <a:pPr algn="l"/>
+            <a:r>
+              <a:rPr sz="900" b="0">
+                <a:solidFill>
+                  <a:srgbClr val="4B5563"/>
+                </a:solidFill>
+              </a:rPr>
+              <a:t>Public-text values (27 CFR 16.21 verbatim)</a:t>
+            </a:r>
+          </a:p>
+          <a:p>
+            <a:pPr algn="l"/>
+            <a:r>
+              <a:rPr sz="900" b="0">
+                <a:solidFill>
+                  <a:srgbClr val="4B5563"/>
+                </a:solidFill>
+              </a:rPr>
+              <a:t>No PII — safe for commodity model</a:t>
+            </a:r>
+          </a:p>
+          <a:p>
+            <a:pPr algn="l"/>
+            <a:r>
+              <a:rPr sz="900" b="0">
+                <a:solidFill>
+                  <a:srgbClr val="4B5563"/>
+                </a:solidFill>
+              </a:rPr>
+              <a:t>Warm: ~1.5-3 s · Anthropic API</a:t>
+            </a:r>
+          </a:p>
+        </p:txBody>
+      </p:sp>
+      <p:sp>
+        <p:nvSpPr>
+          <p:cNvPr id="17" name="Rounded Rectangle 16"/>
+          <p:cNvSpPr/>
+          <p:nvPr/>
+        </p:nvSpPr>
+        <p:spPr>
+          <a:xfrm>
+            <a:off x="8094472" y="1691640"/>
+            <a:ext cx="3594608" cy="3108960"/>
+          </a:xfrm>
+          <a:prstGeom prst="roundRect">
+            <a:avLst>
+              <a:gd name="adj" fmla="val 6000"/>
+            </a:avLst>
+          </a:prstGeom>
+          <a:solidFill>
+            <a:srgbClr val="F9FAFB"/>
+          </a:solidFill>
+          <a:ln w="19050">
+            <a:solidFill>
+              <a:srgbClr val="059669"/>
+            </a:solidFill>
+          </a:ln>
+        </p:spPr>
+        <p:style>
+          <a:lnRef idx="1">
+            <a:schemeClr val="accent1"/>
+          </a:lnRef>
+          <a:fillRef idx="3">
+            <a:schemeClr val="accent1"/>
+          </a:fillRef>
+          <a:effectRef idx="2">
+            <a:schemeClr val="accent1"/>
+          </a:effectRef>
+          <a:fontRef idx="minor">
+            <a:schemeClr val="lt1"/>
+          </a:fontRef>
+        </p:style>
+        <p:txBody>
+          <a:bodyPr rtlCol="0" anchor="ctr"/>
+          <a:lstStyle/>
+          <a:p/>
+        </p:txBody>
+      </p:sp>
+      <p:sp>
+        <p:nvSpPr>
+          <p:cNvPr id="18" name="Rounded Rectangle 17"/>
+          <p:cNvSpPr/>
+          <p:nvPr/>
+        </p:nvSpPr>
+        <p:spPr>
+          <a:xfrm>
+            <a:off x="8094472" y="1691640"/>
+            <a:ext cx="3594608" cy="137160"/>
+          </a:xfrm>
+          <a:prstGeom prst="roundRect">
+            <a:avLst>
+              <a:gd name="adj" fmla="val 6000"/>
+            </a:avLst>
+          </a:prstGeom>
+          <a:solidFill>
+            <a:srgbClr val="059669"/>
+          </a:solidFill>
+          <a:ln>
+            <a:solidFill>
+              <a:srgbClr val="059669"/>
+            </a:solidFill>
+          </a:ln>
+        </p:spPr>
+        <p:style>
+          <a:lnRef idx="1">
+            <a:schemeClr val="accent1"/>
+          </a:lnRef>
+          <a:fillRef idx="3">
+            <a:schemeClr val="accent1"/>
+          </a:fillRef>
+          <a:effectRef idx="2">
+            <a:schemeClr val="accent1"/>
+          </a:effectRef>
+          <a:fontRef idx="minor">
+            <a:schemeClr val="lt1"/>
+          </a:fontRef>
+        </p:style>
+        <p:txBody>
+          <a:bodyPr rtlCol="0" anchor="ctr"/>
+          <a:lstStyle/>
+          <a:p/>
+        </p:txBody>
+      </p:sp>
+      <p:sp>
+        <p:nvSpPr>
+          <p:cNvPr id="19" name="TextBox 18"/>
+          <p:cNvSpPr txBox="1"/>
+          <p:nvPr/>
+        </p:nvSpPr>
+        <p:spPr>
+          <a:xfrm>
+            <a:off x="8259064" y="1965960"/>
+            <a:ext cx="3265424" cy="384048"/>
+          </a:xfrm>
+          <a:prstGeom prst="rect">
+            <a:avLst/>
+          </a:prstGeom>
+          <a:noFill/>
+        </p:spPr>
+        <p:txBody>
+          <a:bodyPr wrap="square" lIns="0" rIns="0" tIns="0" bIns="0">
+            <a:spAutoFit/>
+          </a:bodyPr>
+          <a:lstStyle/>
+          <a:p>
+            <a:pPr algn="l"/>
+            <a:r>
+              <a:rPr sz="1500" b="1">
+                <a:solidFill>
+                  <a:srgbClr val="111111"/>
+                </a:solidFill>
+              </a:rPr>
+              <a:t>Modal Tesseract (CPU)</a:t>
+            </a:r>
+          </a:p>
+        </p:txBody>
+      </p:sp>
+      <p:sp>
+        <p:nvSpPr>
+          <p:cNvPr id="20" name="TextBox 19"/>
+          <p:cNvSpPr txBox="1"/>
+          <p:nvPr/>
+        </p:nvSpPr>
+        <p:spPr>
+          <a:xfrm>
+            <a:off x="8259064" y="2350008"/>
+            <a:ext cx="3265424" cy="292608"/>
+          </a:xfrm>
+          <a:prstGeom prst="rect">
+            <a:avLst/>
+          </a:prstGeom>
+          <a:noFill/>
+        </p:spPr>
+        <p:txBody>
+          <a:bodyPr wrap="square" lIns="0" rIns="0" tIns="0" bIns="0">
+            <a:spAutoFit/>
+          </a:bodyPr>
+          <a:lstStyle/>
+          <a:p>
+            <a:pPr algn="l"/>
+            <a:r>
+              <a:rPr sz="1000" b="0">
+                <a:solidFill>
+                  <a:srgbClr val="6B7280"/>
+                </a:solidFill>
+              </a:rPr>
+              <a:t>Deterministic 16.22 inputs</a:t>
+            </a:r>
+          </a:p>
+        </p:txBody>
+      </p:sp>
+      <p:sp>
+        <p:nvSpPr>
+          <p:cNvPr id="21" name="TextBox 20"/>
+          <p:cNvSpPr txBox="1"/>
+          <p:nvPr/>
+        </p:nvSpPr>
+        <p:spPr>
+          <a:xfrm>
+            <a:off x="8259064" y="2770632"/>
+            <a:ext cx="3265424" cy="1188720"/>
+          </a:xfrm>
+          <a:prstGeom prst="rect">
+            <a:avLst/>
+          </a:prstGeom>
+          <a:noFill/>
+        </p:spPr>
+        <p:txBody>
+          <a:bodyPr wrap="square" lIns="0" rIns="0" tIns="0" bIns="0">
+            <a:spAutoFit/>
+          </a:bodyPr>
+          <a:lstStyle/>
+          <a:p>
+            <a:pPr algn="l"/>
+            <a:r>
+              <a:rPr sz="1100" b="1">
+                <a:solidFill>
+                  <a:srgbClr val="111111"/>
+                </a:solidFill>
+              </a:rPr>
+              <a:t>• Warning bbox height (px)</a:t>
+            </a:r>
+          </a:p>
+          <a:p>
+            <a:pPr algn="l"/>
+            <a:r>
+              <a:rPr sz="1100" b="1">
+                <a:solidFill>
+                  <a:srgbClr val="111111"/>
+                </a:solidFill>
+              </a:rPr>
+              <a:t>• Image DPI (EXIF)</a:t>
+            </a:r>
+          </a:p>
+          <a:p>
+            <a:pPr algn="l"/>
+            <a:r>
+              <a:rPr sz="1100" b="1">
+                <a:solidFill>
+                  <a:srgbClr val="111111"/>
+                </a:solidFill>
+              </a:rPr>
+              <a:t>• ABV / Net regex fallback</a:t>
+            </a:r>
+          </a:p>
+        </p:txBody>
+      </p:sp>
+      <p:sp>
+        <p:nvSpPr>
+          <p:cNvPr id="22" name="TextBox 21"/>
+          <p:cNvSpPr txBox="1"/>
+          <p:nvPr/>
+        </p:nvSpPr>
+        <p:spPr>
+          <a:xfrm>
+            <a:off x="8259064" y="4023360"/>
+            <a:ext cx="3265424" cy="777240"/>
+          </a:xfrm>
+          <a:prstGeom prst="rect">
+            <a:avLst/>
+          </a:prstGeom>
+          <a:noFill/>
+        </p:spPr>
+        <p:txBody>
+          <a:bodyPr wrap="square" lIns="0" rIns="0" tIns="0" bIns="0">
+            <a:spAutoFit/>
+          </a:bodyPr>
+          <a:lstStyle/>
+          <a:p>
+            <a:pPr algn="l"/>
+            <a:r>
+              <a:rPr sz="900" b="0">
+                <a:solidFill>
+                  <a:srgbClr val="4B5563"/>
+                </a:solidFill>
+              </a:rPr>
+              <a:t>Tesseract OCR, no GPU</a:t>
+            </a:r>
+          </a:p>
+          <a:p>
+            <a:pPr algn="l"/>
+            <a:r>
+              <a:rPr sz="900" b="0">
+                <a:solidFill>
+                  <a:srgbClr val="4B5563"/>
+                </a:solidFill>
+              </a:rPr>
+              <a:t>Back-scaled to original-image px</a:t>
+            </a:r>
+          </a:p>
+          <a:p>
+            <a:pPr algn="l"/>
+            <a:r>
+              <a:rPr sz="900" b="0">
+                <a:solidFill>
+                  <a:srgbClr val="4B5563"/>
+                </a:solidFill>
+              </a:rPr>
+              <a:t>Reproducible fontSizeMm measurement</a:t>
+            </a:r>
+          </a:p>
+          <a:p>
+            <a:pPr algn="l"/>
+            <a:r>
+              <a:rPr sz="900" b="0">
+                <a:solidFill>
+                  <a:srgbClr val="4B5563"/>
+                </a:solidFill>
+              </a:rPr>
+              <a:t>Warm: ~1-1.5 s</a:t>
+            </a:r>
+          </a:p>
+        </p:txBody>
+      </p:sp>
+      <p:sp>
+        <p:nvSpPr>
+          <p:cNvPr id="23" name="TextBox 22"/>
+          <p:cNvSpPr txBox="1"/>
+          <p:nvPr/>
+        </p:nvSpPr>
+        <p:spPr>
+          <a:xfrm>
+            <a:off x="502920" y="5001768"/>
+            <a:ext cx="11186160" cy="310896"/>
+          </a:xfrm>
+          <a:prstGeom prst="rect">
+            <a:avLst/>
+          </a:prstGeom>
+          <a:noFill/>
+        </p:spPr>
+        <p:txBody>
+          <a:bodyPr wrap="square" lIns="0" rIns="0" tIns="0" bIns="0">
+            <a:spAutoFit/>
+          </a:bodyPr>
+          <a:lstStyle/>
+          <a:p>
+            <a:pPr algn="ctr"/>
+            <a:r>
+              <a:rPr sz="1100" b="1">
+                <a:solidFill>
+                  <a:srgbClr val="374151"/>
+                </a:solidFill>
+              </a:rPr>
+              <a:t>Vercel FastAPI → asyncio.gather() → _merge_label() → 27 CFR rules engine → VerificationResult</a:t>
+            </a:r>
+          </a:p>
+        </p:txBody>
+      </p:sp>
+      <p:sp>
+        <p:nvSpPr>
+          <p:cNvPr id="24" name="TextBox 23"/>
+          <p:cNvSpPr txBox="1"/>
+          <p:nvPr/>
+        </p:nvSpPr>
+        <p:spPr>
+          <a:xfrm>
+            <a:off x="502920" y="5367528"/>
+            <a:ext cx="11186160" cy="502920"/>
+          </a:xfrm>
+          <a:prstGeom prst="rect">
+            <a:avLst/>
+          </a:prstGeom>
+          <a:noFill/>
+        </p:spPr>
+        <p:txBody>
+          <a:bodyPr wrap="square" lIns="0" rIns="0" tIns="0" bIns="0">
+            <a:spAutoFit/>
+          </a:bodyPr>
+          <a:lstStyle/>
+          <a:p>
+            <a:pPr algn="ctr"/>
+            <a:r>
+              <a:rPr sz="1000" b="0">
+                <a:solidFill>
+                  <a:srgbClr val="6B7280"/>
+                </a:solidFill>
+              </a:rPr>
+              <a:t>On Modal Qwen timeout (MODAL_TIMEOUT=8 s, cold start): falls back to Haiku-only extraction + Tesseract overlay.  extractorSource='haiku-fallback' surfaced on the response.</a:t>
+            </a:r>
+          </a:p>
+        </p:txBody>
+      </p:sp>
+      <p:sp>
+        <p:nvSpPr>
+          <p:cNvPr id="25" name="TextBox 24"/>
+          <p:cNvSpPr txBox="1"/>
+          <p:nvPr/>
+        </p:nvSpPr>
+        <p:spPr>
+          <a:xfrm>
+            <a:off x="502920" y="6446520"/>
+            <a:ext cx="10728960" cy="274320"/>
+          </a:xfrm>
+          <a:prstGeom prst="rect">
+            <a:avLst/>
+          </a:prstGeom>
+          <a:noFill/>
+        </p:spPr>
+        <p:txBody>
+          <a:bodyPr wrap="square" lIns="0" rIns="0" tIns="0" bIns="0">
+            <a:spAutoFit/>
+          </a:bodyPr>
+          <a:lstStyle/>
+          <a:p>
+            <a:pPr algn="l"/>
+            <a:r>
+              <a:rPr sz="900" b="0">
+                <a:solidFill>
+                  <a:srgbClr val="9CA3AF"/>
+                </a:solidFill>
+              </a:rPr>
+              <a:t>TTB Label Verification  ·  Take-Home Implementation Overview</a:t>
+            </a:r>
+          </a:p>
+        </p:txBody>
+      </p:sp>
+      <p:sp>
+        <p:nvSpPr>
+          <p:cNvPr id="26" name="TextBox 25"/>
+          <p:cNvSpPr txBox="1"/>
+          <p:nvPr/>
+        </p:nvSpPr>
+        <p:spPr>
+          <a:xfrm>
+            <a:off x="11140440" y="6446520"/>
+            <a:ext cx="548640" cy="274320"/>
+          </a:xfrm>
+          <a:prstGeom prst="rect">
+            <a:avLst/>
+          </a:prstGeom>
+          <a:noFill/>
+        </p:spPr>
+        <p:txBody>
+          <a:bodyPr wrap="square" lIns="0" rIns="0" tIns="0" bIns="0">
+            <a:spAutoFit/>
+          </a:bodyPr>
+          <a:lstStyle/>
+          <a:p>
+            <a:pPr algn="r"/>
+            <a:r>
+              <a:rPr sz="900" b="0">
+                <a:solidFill>
+                  <a:srgbClr val="9CA3AF"/>
+                </a:solidFill>
+              </a:rPr>
+              <a:t>5 / 13</a:t>
+            </a:r>
+          </a:p>
+        </p:txBody>
+      </p:sp>
+    </p:spTree>
+  </p:cSld>
+  <p:clrMapOvr>
+    <a:masterClrMapping/>
+  </p:clrMapOvr>
+</p:sld>
+</file>
+
+<file path=ppt/slides/slide6.xml><?xml version="1.0" encoding="utf-8"?>
 <p:sld xmlns:a="http://schemas.openxmlformats.org/drawingml/2006/main" xmlns:r="http://schemas.openxmlformats.org/officeDocument/2006/relationships" xmlns:p="http://schemas.openxmlformats.org/presentationml/2006/main">
   <p:cSld name="Slide 5">
     <p:bg>
@@ -8843,6 +11772,10 @@
             <a:prstDash val="solid"/>
           </a:ln>
         </p:spPr>
+        <p:txBody>
+          <a:bodyPr/>
+          <a:p/>
+        </p:txBody>
       </p:sp>
       <p:sp>
         <p:nvSpPr>
@@ -8994,7 +11927,7 @@
                 <a:ea typeface="Calibri" pitchFamily="34" charset="-122"/>
                 <a:cs typeface="Calibri" pitchFamily="34" charset="-120"/>
               </a:rPr>
-              <a:t>5 / 12</a:t>
+              <a:t>6 / 13</a:t>
             </a:r>
             <a:endParaRPr lang="en-US" sz="900" dirty="0"/>
           </a:p>
@@ -9024,6 +11957,10 @@
             <a:prstDash val="solid"/>
           </a:ln>
         </p:spPr>
+        <p:txBody>
+          <a:bodyPr/>
+          <a:p/>
+        </p:txBody>
       </p:sp>
       <p:sp>
         <p:nvSpPr>
@@ -9166,6 +12103,10 @@
             <a:prstDash val="solid"/>
           </a:ln>
         </p:spPr>
+        <p:txBody>
+          <a:bodyPr/>
+          <a:p/>
+        </p:txBody>
       </p:sp>
       <p:pic>
         <p:nvPicPr>
@@ -9332,6 +12273,10 @@
             <a:prstDash val="solid"/>
           </a:ln>
         </p:spPr>
+        <p:txBody>
+          <a:bodyPr/>
+          <a:p/>
+        </p:txBody>
       </p:sp>
       <p:pic>
         <p:nvPicPr>
@@ -9498,6 +12443,10 @@
             <a:prstDash val="solid"/>
           </a:ln>
         </p:spPr>
+        <p:txBody>
+          <a:bodyPr/>
+          <a:p/>
+        </p:txBody>
       </p:sp>
       <p:pic>
         <p:nvPicPr>
@@ -9664,6 +12613,10 @@
             <a:prstDash val="solid"/>
           </a:ln>
         </p:spPr>
+        <p:txBody>
+          <a:bodyPr/>
+          <a:p/>
+        </p:txBody>
       </p:sp>
       <p:pic>
         <p:nvPicPr>
@@ -9830,6 +12783,10 @@
             <a:prstDash val="solid"/>
           </a:ln>
         </p:spPr>
+        <p:txBody>
+          <a:bodyPr/>
+          <a:p/>
+        </p:txBody>
       </p:sp>
       <p:pic>
         <p:nvPicPr>
@@ -9996,6 +12953,10 @@
             <a:prstDash val="solid"/>
           </a:ln>
         </p:spPr>
+        <p:txBody>
+          <a:bodyPr/>
+          <a:p/>
+        </p:txBody>
       </p:sp>
       <p:pic>
         <p:nvPicPr>
@@ -10162,6 +13123,10 @@
             <a:prstDash val="solid"/>
           </a:ln>
         </p:spPr>
+        <p:txBody>
+          <a:bodyPr/>
+          <a:p/>
+        </p:txBody>
       </p:sp>
       <p:pic>
         <p:nvPicPr>
@@ -10351,7 +13316,7 @@
 </p:sld>
 </file>
 
-<file path=ppt/slides/slide6.xml><?xml version="1.0" encoding="utf-8"?>
+<file path=ppt/slides/slide7.xml><?xml version="1.0" encoding="utf-8"?>
 <p:sld xmlns:a="http://schemas.openxmlformats.org/drawingml/2006/main" xmlns:r="http://schemas.openxmlformats.org/officeDocument/2006/relationships" xmlns:p="http://schemas.openxmlformats.org/presentationml/2006/main">
   <p:cSld name="Slide 6">
     <p:bg>
@@ -10399,6 +13364,10 @@
             <a:prstDash val="solid"/>
           </a:ln>
         </p:spPr>
+        <p:txBody>
+          <a:bodyPr/>
+          <a:p/>
+        </p:txBody>
       </p:sp>
       <p:sp>
         <p:nvSpPr>
@@ -10550,7 +13519,7 @@
                 <a:ea typeface="Calibri" pitchFamily="34" charset="-122"/>
                 <a:cs typeface="Calibri" pitchFamily="34" charset="-120"/>
               </a:rPr>
-              <a:t>6 / 12</a:t>
+              <a:t>7 / 13</a:t>
             </a:r>
             <a:endParaRPr lang="en-US" sz="900" dirty="0"/>
           </a:p>
@@ -10853,7 +13822,7 @@
 </p:sld>
 </file>
 
-<file path=ppt/slides/slide7.xml><?xml version="1.0" encoding="utf-8"?>
+<file path=ppt/slides/slide8.xml><?xml version="1.0" encoding="utf-8"?>
 <p:sld xmlns:a="http://schemas.openxmlformats.org/drawingml/2006/main" xmlns:r="http://schemas.openxmlformats.org/officeDocument/2006/relationships" xmlns:p="http://schemas.openxmlformats.org/presentationml/2006/main">
   <p:cSld name="Slide 7">
     <p:bg>
@@ -10901,6 +13870,10 @@
             <a:prstDash val="solid"/>
           </a:ln>
         </p:spPr>
+        <p:txBody>
+          <a:bodyPr/>
+          <a:p/>
+        </p:txBody>
       </p:sp>
       <p:sp>
         <p:nvSpPr>
@@ -11052,7 +14025,7 @@
                 <a:ea typeface="Calibri" pitchFamily="34" charset="-122"/>
                 <a:cs typeface="Calibri" pitchFamily="34" charset="-120"/>
               </a:rPr>
-              <a:t>7 / 12</a:t>
+              <a:t>8 / 13</a:t>
             </a:r>
             <a:endParaRPr lang="en-US" sz="900" dirty="0"/>
           </a:p>
@@ -11082,6 +14055,10 @@
             <a:prstDash val="solid"/>
           </a:ln>
         </p:spPr>
+        <p:txBody>
+          <a:bodyPr/>
+          <a:p/>
+        </p:txBody>
       </p:sp>
       <p:sp>
         <p:nvSpPr>
@@ -11107,6 +14084,10 @@
             <a:prstDash val="solid"/>
           </a:ln>
         </p:spPr>
+        <p:txBody>
+          <a:bodyPr/>
+          <a:p/>
+        </p:txBody>
       </p:sp>
       <p:sp>
         <p:nvSpPr>
@@ -11447,6 +14428,10 @@
             </a:outerShdw>
           </a:effectLst>
         </p:spPr>
+        <p:txBody>
+          <a:bodyPr/>
+          <a:p/>
+        </p:txBody>
       </p:sp>
       <p:sp>
         <p:nvSpPr>
@@ -11472,6 +14457,10 @@
             <a:prstDash val="solid"/>
           </a:ln>
         </p:spPr>
+        <p:txBody>
+          <a:bodyPr/>
+          <a:p/>
+        </p:txBody>
       </p:sp>
       <p:sp>
         <p:nvSpPr>
@@ -11933,7 +14922,7 @@
 </p:sld>
 </file>
 
-<file path=ppt/slides/slide8.xml><?xml version="1.0" encoding="utf-8"?>
+<file path=ppt/slides/slide9.xml><?xml version="1.0" encoding="utf-8"?>
 <p:sld xmlns:a="http://schemas.openxmlformats.org/drawingml/2006/main" xmlns:r="http://schemas.openxmlformats.org/officeDocument/2006/relationships" xmlns:p="http://schemas.openxmlformats.org/presentationml/2006/main">
   <p:cSld name="Slide 8">
     <p:bg>
@@ -11981,6 +14970,10 @@
             <a:prstDash val="solid"/>
           </a:ln>
         </p:spPr>
+        <p:txBody>
+          <a:bodyPr/>
+          <a:p/>
+        </p:txBody>
       </p:sp>
       <p:sp>
         <p:nvSpPr>
@@ -12132,7 +15125,7 @@
                 <a:ea typeface="Calibri" pitchFamily="34" charset="-122"/>
                 <a:cs typeface="Calibri" pitchFamily="34" charset="-120"/>
               </a:rPr>
-              <a:t>8 / 12</a:t>
+              <a:t>9 / 13</a:t>
             </a:r>
             <a:endParaRPr lang="en-US" sz="900" dirty="0"/>
           </a:p>
@@ -12162,6 +15155,10 @@
             <a:prstDash val="solid"/>
           </a:ln>
         </p:spPr>
+        <p:txBody>
+          <a:bodyPr/>
+          <a:p/>
+        </p:txBody>
       </p:sp>
       <p:sp>
         <p:nvSpPr>
@@ -12187,6 +15184,10 @@
             <a:prstDash val="solid"/>
           </a:ln>
         </p:spPr>
+        <p:txBody>
+          <a:bodyPr/>
+          <a:p/>
+        </p:txBody>
       </p:sp>
       <p:sp>
         <p:nvSpPr>
@@ -12290,6 +15291,10 @@
             <a:prstDash val="solid"/>
           </a:ln>
         </p:spPr>
+        <p:txBody>
+          <a:bodyPr/>
+          <a:p/>
+        </p:txBody>
       </p:sp>
       <p:sp>
         <p:nvSpPr>
@@ -12432,6 +15437,10 @@
             <a:prstDash val="solid"/>
           </a:ln>
         </p:spPr>
+        <p:txBody>
+          <a:bodyPr/>
+          <a:p/>
+        </p:txBody>
       </p:sp>
       <p:sp>
         <p:nvSpPr>
@@ -12535,6 +15544,10 @@
             <a:prstDash val="solid"/>
           </a:ln>
         </p:spPr>
+        <p:txBody>
+          <a:bodyPr/>
+          <a:p/>
+        </p:txBody>
       </p:sp>
       <p:sp>
         <p:nvSpPr>
@@ -12677,6 +15690,10 @@
             <a:prstDash val="solid"/>
           </a:ln>
         </p:spPr>
+        <p:txBody>
+          <a:bodyPr/>
+          <a:p/>
+        </p:txBody>
       </p:sp>
       <p:sp>
         <p:nvSpPr>
@@ -12780,6 +15797,10 @@
             <a:prstDash val="solid"/>
           </a:ln>
         </p:spPr>
+        <p:txBody>
+          <a:bodyPr/>
+          <a:p/>
+        </p:txBody>
       </p:sp>
       <p:sp>
         <p:nvSpPr>
@@ -12922,6 +15943,10 @@
             <a:prstDash val="solid"/>
           </a:ln>
         </p:spPr>
+        <p:txBody>
+          <a:bodyPr/>
+          <a:p/>
+        </p:txBody>
       </p:sp>
       <p:sp>
         <p:nvSpPr>
@@ -13025,6 +16050,10 @@
             <a:prstDash val="solid"/>
           </a:ln>
         </p:spPr>
+        <p:txBody>
+          <a:bodyPr/>
+          <a:p/>
+        </p:txBody>
       </p:sp>
       <p:sp>
         <p:nvSpPr>
@@ -13167,6 +16196,10 @@
             <a:prstDash val="solid"/>
           </a:ln>
         </p:spPr>
+        <p:txBody>
+          <a:bodyPr/>
+          <a:p/>
+        </p:txBody>
       </p:sp>
       <p:sp>
         <p:nvSpPr>
@@ -13270,6 +16303,10 @@
             <a:prstDash val="solid"/>
           </a:ln>
         </p:spPr>
+        <p:txBody>
+          <a:bodyPr/>
+          <a:p/>
+        </p:txBody>
       </p:sp>
       <p:sp>
         <p:nvSpPr>
@@ -13385,1576 +16422,6 @@
               <a:t>Vercel (Haiku) live, Modal (Qwen v2) validated. b817f82 scorer fix revealed 78% real accuracy. GitHub Release with weights + eval pack.</a:t>
             </a:r>
             <a:endParaRPr lang="en-US" sz="1100" dirty="0"/>
-          </a:p>
-        </p:txBody>
-      </p:sp>
-    </p:spTree>
-  </p:cSld>
-  <p:clrMapOvr>
-    <a:masterClrMapping/>
-  </p:clrMapOvr>
-</p:sld>
-</file>
-
-<file path=ppt/slides/slide9.xml><?xml version="1.0" encoding="utf-8"?>
-<p:sld xmlns:a="http://schemas.openxmlformats.org/drawingml/2006/main" xmlns:r="http://schemas.openxmlformats.org/officeDocument/2006/relationships" xmlns:p="http://schemas.openxmlformats.org/presentationml/2006/main">
-  <p:cSld name="Slide 9">
-    <p:bg>
-      <p:bgPr>
-        <a:solidFill>
-          <a:srgbClr val="F7F9FC"/>
-        </a:solidFill>
-      </p:bgPr>
-    </p:bg>
-    <p:spTree>
-      <p:nvGrpSpPr>
-        <p:cNvPr id="1" name=""/>
-        <p:cNvGrpSpPr/>
-        <p:nvPr/>
-      </p:nvGrpSpPr>
-      <p:grpSpPr>
-        <a:xfrm>
-          <a:off x="0" y="0"/>
-          <a:ext cx="0" cy="0"/>
-          <a:chOff x="0" y="0"/>
-          <a:chExt cx="0" cy="0"/>
-        </a:xfrm>
-      </p:grpSpPr>
-      <p:sp>
-        <p:nvSpPr>
-          <p:cNvPr id="2" name="Shape 0"/>
-          <p:cNvSpPr/>
-          <p:nvPr/>
-        </p:nvSpPr>
-        <p:spPr>
-          <a:xfrm>
-            <a:off x="0" y="0"/>
-            <a:ext cx="164592" cy="6858000"/>
-          </a:xfrm>
-          <a:prstGeom prst="rect">
-            <a:avLst/>
-          </a:prstGeom>
-          <a:solidFill>
-            <a:srgbClr val="1E2761"/>
-          </a:solidFill>
-          <a:ln w="12700">
-            <a:solidFill>
-              <a:srgbClr val="333333"/>
-            </a:solidFill>
-            <a:prstDash val="solid"/>
-          </a:ln>
-        </p:spPr>
-      </p:sp>
-      <p:sp>
-        <p:nvSpPr>
-          <p:cNvPr id="3" name="Text 1"/>
-          <p:cNvSpPr/>
-          <p:nvPr/>
-        </p:nvSpPr>
-        <p:spPr>
-          <a:xfrm>
-            <a:off x="502920" y="411480"/>
-            <a:ext cx="11247120" cy="274320"/>
-          </a:xfrm>
-          <a:prstGeom prst="rect">
-            <a:avLst/>
-          </a:prstGeom>
-          <a:noFill/>
-          <a:ln/>
-        </p:spPr>
-        <p:txBody>
-          <a:bodyPr wrap="square" lIns="0" tIns="0" rIns="0" bIns="0" rtlCol="0" anchor="ctr"/>
-          <a:lstStyle/>
-          <a:p>
-            <a:pPr indent="0" marL="0">
-              <a:buNone/>
-            </a:pPr>
-            <a:r>
-              <a:rPr lang="en-US" sz="1100" b="1" spc="600" kern="0" dirty="0">
-                <a:solidFill>
-                  <a:srgbClr val="028090"/>
-                </a:solidFill>
-                <a:latin typeface="Calibri" pitchFamily="34" charset="0"/>
-                <a:ea typeface="Calibri" pitchFamily="34" charset="-122"/>
-                <a:cs typeface="Calibri" pitchFamily="34" charset="-120"/>
-              </a:rPr>
-              <a:t>SECTION 8 · THREE DEPLOYMENT TOPOLOGIES</a:t>
-            </a:r>
-            <a:endParaRPr lang="en-US" sz="1100" dirty="0"/>
-          </a:p>
-        </p:txBody>
-      </p:sp>
-      <p:sp>
-        <p:nvSpPr>
-          <p:cNvPr id="4" name="Text 2"/>
-          <p:cNvSpPr/>
-          <p:nvPr/>
-        </p:nvSpPr>
-        <p:spPr>
-          <a:xfrm>
-            <a:off x="502920" y="685800"/>
-            <a:ext cx="11247120" cy="731520"/>
-          </a:xfrm>
-          <a:prstGeom prst="rect">
-            <a:avLst/>
-          </a:prstGeom>
-          <a:noFill/>
-          <a:ln/>
-        </p:spPr>
-        <p:txBody>
-          <a:bodyPr wrap="square" lIns="0" tIns="0" rIns="0" bIns="0" rtlCol="0" anchor="ctr"/>
-          <a:lstStyle/>
-          <a:p>
-            <a:pPr indent="0" marL="0">
-              <a:buNone/>
-            </a:pPr>
-            <a:r>
-              <a:rPr lang="en-US" sz="3200" b="1" dirty="0">
-                <a:solidFill>
-                  <a:srgbClr val="1E2761"/>
-                </a:solidFill>
-                <a:latin typeface="Georgia" pitchFamily="34" charset="0"/>
-                <a:ea typeface="Georgia" pitchFamily="34" charset="-122"/>
-                <a:cs typeface="Georgia" pitchFamily="34" charset="-120"/>
-              </a:rPr>
-              <a:t>Same code · privacy boundary on PII</a:t>
-            </a:r>
-            <a:endParaRPr lang="en-US" sz="3200" dirty="0"/>
-          </a:p>
-        </p:txBody>
-      </p:sp>
-      <p:sp>
-        <p:nvSpPr>
-          <p:cNvPr id="5" name="Text 3"/>
-          <p:cNvSpPr/>
-          <p:nvPr/>
-        </p:nvSpPr>
-        <p:spPr>
-          <a:xfrm>
-            <a:off x="502920" y="6446520"/>
-            <a:ext cx="7315200" cy="274320"/>
-          </a:xfrm>
-          <a:prstGeom prst="rect">
-            <a:avLst/>
-          </a:prstGeom>
-          <a:noFill/>
-          <a:ln/>
-        </p:spPr>
-        <p:txBody>
-          <a:bodyPr wrap="square" lIns="0" tIns="0" rIns="0" bIns="0" rtlCol="0" anchor="ctr"/>
-          <a:lstStyle/>
-          <a:p>
-            <a:pPr indent="0" marL="0">
-              <a:buNone/>
-            </a:pPr>
-            <a:r>
-              <a:rPr lang="en-US" sz="900" dirty="0">
-                <a:solidFill>
-                  <a:srgbClr val="6B7280"/>
-                </a:solidFill>
-                <a:latin typeface="Calibri" pitchFamily="34" charset="0"/>
-                <a:ea typeface="Calibri" pitchFamily="34" charset="-122"/>
-                <a:cs typeface="Calibri" pitchFamily="34" charset="-120"/>
-              </a:rPr>
-              <a:t>TTB Label Verification  ·  Take-Home Implementation Overview</a:t>
-            </a:r>
-            <a:endParaRPr lang="en-US" sz="900" dirty="0"/>
-          </a:p>
-        </p:txBody>
-      </p:sp>
-      <p:sp>
-        <p:nvSpPr>
-          <p:cNvPr id="6" name="Text 4"/>
-          <p:cNvSpPr/>
-          <p:nvPr/>
-        </p:nvSpPr>
-        <p:spPr>
-          <a:xfrm>
-            <a:off x="10972800" y="6446520"/>
-            <a:ext cx="914400" cy="274320"/>
-          </a:xfrm>
-          <a:prstGeom prst="rect">
-            <a:avLst/>
-          </a:prstGeom>
-          <a:noFill/>
-          <a:ln/>
-        </p:spPr>
-        <p:txBody>
-          <a:bodyPr wrap="square" lIns="0" tIns="0" rIns="0" bIns="0" rtlCol="0" anchor="ctr"/>
-          <a:lstStyle/>
-          <a:p>
-            <a:pPr algn="r" indent="0" marL="0">
-              <a:buNone/>
-            </a:pPr>
-            <a:r>
-              <a:rPr lang="en-US" sz="900" dirty="0">
-                <a:solidFill>
-                  <a:srgbClr val="6B7280"/>
-                </a:solidFill>
-                <a:latin typeface="Calibri" pitchFamily="34" charset="0"/>
-                <a:ea typeface="Calibri" pitchFamily="34" charset="-122"/>
-                <a:cs typeface="Calibri" pitchFamily="34" charset="-120"/>
-              </a:rPr>
-              <a:t>9 / 12</a:t>
-            </a:r>
-            <a:endParaRPr lang="en-US" sz="900" dirty="0"/>
-          </a:p>
-        </p:txBody>
-      </p:sp>
-      <p:sp>
-        <p:nvSpPr>
-          <p:cNvPr id="7" name="Shape 5"/>
-          <p:cNvSpPr/>
-          <p:nvPr/>
-        </p:nvSpPr>
-        <p:spPr>
-          <a:xfrm>
-            <a:off x="411480" y="1691640"/>
-            <a:ext cx="3657600" cy="4663440"/>
-          </a:xfrm>
-          <a:prstGeom prst="rect">
-            <a:avLst/>
-          </a:prstGeom>
-          <a:solidFill>
-            <a:srgbClr val="FFFFFF"/>
-          </a:solidFill>
-          <a:ln w="12700">
-            <a:solidFill>
-              <a:srgbClr val="CADCFC"/>
-            </a:solidFill>
-            <a:prstDash val="solid"/>
-          </a:ln>
-          <a:effectLst>
-            <a:outerShdw sx="100000" sy="100000" kx="0" ky="0" algn="bl" rotWithShape="0" blurRad="127000" dist="25400" dir="8100000">
-              <a:srgbClr val="000000">
-                <a:alpha val="6000"/>
-              </a:srgbClr>
-            </a:outerShdw>
-          </a:effectLst>
-        </p:spPr>
-      </p:sp>
-      <p:sp>
-        <p:nvSpPr>
-          <p:cNvPr id="8" name="Shape 6"/>
-          <p:cNvSpPr/>
-          <p:nvPr/>
-        </p:nvSpPr>
-        <p:spPr>
-          <a:xfrm>
-            <a:off x="411480" y="1691640"/>
-            <a:ext cx="3657600" cy="109728"/>
-          </a:xfrm>
-          <a:prstGeom prst="rect">
-            <a:avLst/>
-          </a:prstGeom>
-          <a:solidFill>
-            <a:srgbClr val="028090"/>
-          </a:solidFill>
-          <a:ln w="12700">
-            <a:solidFill>
-              <a:srgbClr val="333333"/>
-            </a:solidFill>
-            <a:prstDash val="solid"/>
-          </a:ln>
-        </p:spPr>
-      </p:sp>
-      <p:sp>
-        <p:nvSpPr>
-          <p:cNvPr id="9" name="Text 7"/>
-          <p:cNvSpPr/>
-          <p:nvPr/>
-        </p:nvSpPr>
-        <p:spPr>
-          <a:xfrm>
-            <a:off x="777240" y="1965960"/>
-            <a:ext cx="822960" cy="914400"/>
-          </a:xfrm>
-          <a:prstGeom prst="rect">
-            <a:avLst/>
-          </a:prstGeom>
-          <a:noFill/>
-          <a:ln/>
-        </p:spPr>
-        <p:txBody>
-          <a:bodyPr wrap="square" lIns="0" tIns="0" rIns="0" bIns="0" rtlCol="0" anchor="ctr"/>
-          <a:lstStyle/>
-          <a:p>
-            <a:pPr indent="0" marL="0">
-              <a:buNone/>
-            </a:pPr>
-            <a:r>
-              <a:rPr lang="en-US" sz="7200" b="1" dirty="0">
-                <a:solidFill>
-                  <a:srgbClr val="028090"/>
-                </a:solidFill>
-                <a:latin typeface="Georgia" pitchFamily="34" charset="0"/>
-                <a:ea typeface="Georgia" pitchFamily="34" charset="-122"/>
-                <a:cs typeface="Georgia" pitchFamily="34" charset="-120"/>
-              </a:rPr>
-              <a:t>A</a:t>
-            </a:r>
-            <a:endParaRPr lang="en-US" sz="7200" dirty="0"/>
-          </a:p>
-        </p:txBody>
-      </p:sp>
-      <p:pic>
-        <p:nvPicPr>
-          <p:cNvPr id="10" name="Image 0" descr="preencoded.png">    </p:cNvPr>
-          <p:cNvPicPr>
-            <a:picLocks noChangeAspect="1"/>
-          </p:cNvPicPr>
-          <p:nvPr/>
-        </p:nvPicPr>
-        <p:blipFill>
-          <a:blip r:embed="rId1"/>
-          <a:stretch>
-            <a:fillRect/>
-          </a:stretch>
-        </p:blipFill>
-        <p:spPr>
-          <a:xfrm>
-            <a:off x="3200400" y="2103120"/>
-            <a:ext cx="502920" cy="502920"/>
-          </a:xfrm>
-          <a:prstGeom prst="rect">
-            <a:avLst/>
-          </a:prstGeom>
-        </p:spPr>
-      </p:pic>
-      <p:sp>
-        <p:nvSpPr>
-          <p:cNvPr id="11" name="Shape 8"/>
-          <p:cNvSpPr/>
-          <p:nvPr/>
-        </p:nvSpPr>
-        <p:spPr>
-          <a:xfrm>
-            <a:off x="2514600" y="2057400"/>
-            <a:ext cx="594360" cy="274320"/>
-          </a:xfrm>
-          <a:prstGeom prst="rect">
-            <a:avLst/>
-          </a:prstGeom>
-          <a:solidFill>
-            <a:srgbClr val="028090"/>
-          </a:solidFill>
-          <a:ln w="12700">
-            <a:solidFill>
-              <a:srgbClr val="333333"/>
-            </a:solidFill>
-            <a:prstDash val="solid"/>
-          </a:ln>
-        </p:spPr>
-      </p:sp>
-      <p:sp>
-        <p:nvSpPr>
-          <p:cNvPr id="12" name="Text 9"/>
-          <p:cNvSpPr/>
-          <p:nvPr/>
-        </p:nvSpPr>
-        <p:spPr>
-          <a:xfrm>
-            <a:off x="2514600" y="2075688"/>
-            <a:ext cx="594360" cy="237744"/>
-          </a:xfrm>
-          <a:prstGeom prst="rect">
-            <a:avLst/>
-          </a:prstGeom>
-          <a:noFill/>
-          <a:ln/>
-        </p:spPr>
-        <p:txBody>
-          <a:bodyPr wrap="square" lIns="0" tIns="0" rIns="0" bIns="0" rtlCol="0" anchor="ctr"/>
-          <a:lstStyle/>
-          <a:p>
-            <a:pPr algn="ctr" indent="0" marL="0">
-              <a:buNone/>
-            </a:pPr>
-            <a:r>
-              <a:rPr lang="en-US" sz="900" b="1" spc="400" kern="0" dirty="0">
-                <a:solidFill>
-                  <a:srgbClr val="FFFFFF"/>
-                </a:solidFill>
-                <a:latin typeface="Calibri" pitchFamily="34" charset="0"/>
-                <a:ea typeface="Calibri" pitchFamily="34" charset="-122"/>
-                <a:cs typeface="Calibri" pitchFamily="34" charset="-120"/>
-              </a:rPr>
-              <a:t>LIVE</a:t>
-            </a:r>
-            <a:endParaRPr lang="en-US" sz="900" dirty="0"/>
-          </a:p>
-        </p:txBody>
-      </p:sp>
-      <p:sp>
-        <p:nvSpPr>
-          <p:cNvPr id="13" name="Text 10"/>
-          <p:cNvSpPr/>
-          <p:nvPr/>
-        </p:nvSpPr>
-        <p:spPr>
-          <a:xfrm>
-            <a:off x="777240" y="2971800"/>
-            <a:ext cx="2926080" cy="457200"/>
-          </a:xfrm>
-          <a:prstGeom prst="rect">
-            <a:avLst/>
-          </a:prstGeom>
-          <a:noFill/>
-          <a:ln/>
-        </p:spPr>
-        <p:txBody>
-          <a:bodyPr wrap="square" lIns="0" tIns="0" rIns="0" bIns="0" rtlCol="0" anchor="ctr"/>
-          <a:lstStyle/>
-          <a:p>
-            <a:pPr indent="0" marL="0">
-              <a:buNone/>
-            </a:pPr>
-            <a:r>
-              <a:rPr lang="en-US" sz="2200" b="1" dirty="0">
-                <a:solidFill>
-                  <a:srgbClr val="1E2761"/>
-                </a:solidFill>
-                <a:latin typeface="Georgia" pitchFamily="34" charset="0"/>
-                <a:ea typeface="Georgia" pitchFamily="34" charset="-122"/>
-                <a:cs typeface="Georgia" pitchFamily="34" charset="-120"/>
-              </a:rPr>
-              <a:t>Privacy-focused hybrid</a:t>
-            </a:r>
-            <a:endParaRPr lang="en-US" sz="2200" dirty="0"/>
-          </a:p>
-        </p:txBody>
-      </p:sp>
-      <p:sp>
-        <p:nvSpPr>
-          <p:cNvPr id="14" name="Text 11"/>
-          <p:cNvSpPr/>
-          <p:nvPr/>
-        </p:nvSpPr>
-        <p:spPr>
-          <a:xfrm>
-            <a:off x="777240" y="3429000"/>
-            <a:ext cx="2926080" cy="320040"/>
-          </a:xfrm>
-          <a:prstGeom prst="rect">
-            <a:avLst/>
-          </a:prstGeom>
-          <a:noFill/>
-          <a:ln/>
-        </p:spPr>
-        <p:txBody>
-          <a:bodyPr wrap="square" lIns="0" tIns="0" rIns="0" bIns="0" rtlCol="0" anchor="ctr"/>
-          <a:lstStyle/>
-          <a:p>
-            <a:pPr indent="0" marL="0">
-              <a:buNone/>
-            </a:pPr>
-            <a:r>
-              <a:rPr lang="en-US" sz="1100" b="1" spc="300" kern="0" dirty="0">
-                <a:solidFill>
-                  <a:srgbClr val="028090"/>
-                </a:solidFill>
-                <a:latin typeface="Calibri" pitchFamily="34" charset="0"/>
-                <a:ea typeface="Calibri" pitchFamily="34" charset="-122"/>
-                <a:cs typeface="Calibri" pitchFamily="34" charset="-120"/>
-              </a:rPr>
-              <a:t>Vercel + Modal Qwen v2 + Haiku — currently live</a:t>
-            </a:r>
-            <a:endParaRPr lang="en-US" sz="1100" dirty="0"/>
-          </a:p>
-        </p:txBody>
-      </p:sp>
-      <p:sp>
-        <p:nvSpPr>
-          <p:cNvPr id="15" name="Text 12"/>
-          <p:cNvSpPr/>
-          <p:nvPr/>
-        </p:nvSpPr>
-        <p:spPr>
-          <a:xfrm>
-            <a:off x="777240" y="3840480"/>
-            <a:ext cx="2926080" cy="1645920"/>
-          </a:xfrm>
-          <a:prstGeom prst="rect">
-            <a:avLst/>
-          </a:prstGeom>
-          <a:noFill/>
-          <a:ln/>
-        </p:spPr>
-        <p:txBody>
-          <a:bodyPr wrap="square" lIns="0" tIns="0" rIns="0" bIns="0" rtlCol="0" anchor="ctr"/>
-          <a:lstStyle/>
-          <a:p>
-            <a:pPr indent="0" marL="0">
-              <a:buNone/>
-            </a:pPr>
-            <a:r>
-              <a:rPr lang="en-US" sz="1200" dirty="0">
-                <a:solidFill>
-                  <a:srgbClr val="1F2937"/>
-                </a:solidFill>
-                <a:latin typeface="Calibri" pitchFamily="34" charset="0"/>
-                <a:ea typeface="Calibri" pitchFamily="34" charset="-122"/>
-                <a:cs typeface="Calibri" pitchFamily="34" charset="-120"/>
-              </a:rPr>
-              <a:t>React on Vercel CDN. Modal Qwen v2 LoRA on a container WE control reads the 4 PII fields (brand, class, bottler, country). Anthropic Haiku reads the 27 CFR 16.21 verbatim warning text + ABV + net contents — all public-text values with no privacy classification. Label images traverse Modal (our boundary) and Haiku (public-text only).</a:t>
-            </a:r>
-            <a:endParaRPr lang="en-US" sz="1200" dirty="0"/>
-          </a:p>
-        </p:txBody>
-      </p:sp>
-      <p:sp>
-        <p:nvSpPr>
-          <p:cNvPr id="16" name="Shape 13"/>
-          <p:cNvSpPr/>
-          <p:nvPr/>
-        </p:nvSpPr>
-        <p:spPr>
-          <a:xfrm>
-            <a:off x="777240" y="5577840"/>
-            <a:ext cx="2926080" cy="18288"/>
-          </a:xfrm>
-          <a:prstGeom prst="rect">
-            <a:avLst/>
-          </a:prstGeom>
-          <a:solidFill>
-            <a:srgbClr val="CADCFC"/>
-          </a:solidFill>
-          <a:ln w="12700">
-            <a:solidFill>
-              <a:srgbClr val="333333"/>
-            </a:solidFill>
-            <a:prstDash val="solid"/>
-          </a:ln>
-        </p:spPr>
-      </p:sp>
-      <p:sp>
-        <p:nvSpPr>
-          <p:cNvPr id="17" name="Text 14"/>
-          <p:cNvSpPr/>
-          <p:nvPr/>
-        </p:nvSpPr>
-        <p:spPr>
-          <a:xfrm>
-            <a:off x="777240" y="5669280"/>
-            <a:ext cx="2926080" cy="201168"/>
-          </a:xfrm>
-          <a:prstGeom prst="rect">
-            <a:avLst/>
-          </a:prstGeom>
-          <a:noFill/>
-          <a:ln/>
-        </p:spPr>
-        <p:txBody>
-          <a:bodyPr wrap="square" lIns="0" tIns="0" rIns="0" bIns="0" rtlCol="0" anchor="ctr"/>
-          <a:lstStyle/>
-          <a:p>
-            <a:pPr indent="0" marL="0">
-              <a:buNone/>
-            </a:pPr>
-            <a:r>
-              <a:rPr lang="en-US" sz="900" b="1" spc="300" kern="0" dirty="0">
-                <a:solidFill>
-                  <a:srgbClr val="6B7280"/>
-                </a:solidFill>
-                <a:latin typeface="Calibri" pitchFamily="34" charset="0"/>
-                <a:ea typeface="Calibri" pitchFamily="34" charset="-122"/>
-                <a:cs typeface="Calibri" pitchFamily="34" charset="-120"/>
-              </a:rPr>
-              <a:t>Cost</a:t>
-            </a:r>
-            <a:endParaRPr lang="en-US" sz="900" dirty="0"/>
-          </a:p>
-        </p:txBody>
-      </p:sp>
-      <p:sp>
-        <p:nvSpPr>
-          <p:cNvPr id="18" name="Text 15"/>
-          <p:cNvSpPr/>
-          <p:nvPr/>
-        </p:nvSpPr>
-        <p:spPr>
-          <a:xfrm>
-            <a:off x="777240" y="5852160"/>
-            <a:ext cx="2926080" cy="201168"/>
-          </a:xfrm>
-          <a:prstGeom prst="rect">
-            <a:avLst/>
-          </a:prstGeom>
-          <a:noFill/>
-          <a:ln/>
-        </p:spPr>
-        <p:txBody>
-          <a:bodyPr wrap="square" lIns="0" tIns="0" rIns="0" bIns="0" rtlCol="0" anchor="ctr"/>
-          <a:lstStyle/>
-          <a:p>
-            <a:pPr indent="0" marL="0">
-              <a:buNone/>
-            </a:pPr>
-            <a:r>
-              <a:rPr lang="en-US" sz="1100" dirty="0">
-                <a:solidFill>
-                  <a:srgbClr val="1F2937"/>
-                </a:solidFill>
-                <a:latin typeface="Calibri" pitchFamily="34" charset="0"/>
-                <a:ea typeface="Calibri" pitchFamily="34" charset="-122"/>
-                <a:cs typeface="Calibri" pitchFamily="34" charset="-120"/>
-              </a:rPr>
-              <a:t>$0–5/mo + $1/1000 labels</a:t>
-            </a:r>
-            <a:endParaRPr lang="en-US" sz="1100" dirty="0"/>
-          </a:p>
-        </p:txBody>
-      </p:sp>
-      <p:sp>
-        <p:nvSpPr>
-          <p:cNvPr id="19" name="Text 16"/>
-          <p:cNvSpPr/>
-          <p:nvPr/>
-        </p:nvSpPr>
-        <p:spPr>
-          <a:xfrm>
-            <a:off x="777240" y="6062472"/>
-            <a:ext cx="2926080" cy="201168"/>
-          </a:xfrm>
-          <a:prstGeom prst="rect">
-            <a:avLst/>
-          </a:prstGeom>
-          <a:noFill/>
-          <a:ln/>
-        </p:spPr>
-        <p:txBody>
-          <a:bodyPr wrap="square" lIns="0" tIns="0" rIns="0" bIns="0" rtlCol="0" anchor="ctr"/>
-          <a:lstStyle/>
-          <a:p>
-            <a:pPr indent="0" marL="0">
-              <a:buNone/>
-            </a:pPr>
-            <a:r>
-              <a:rPr lang="en-US" sz="900" b="1" spc="300" kern="0" dirty="0">
-                <a:solidFill>
-                  <a:srgbClr val="6B7280"/>
-                </a:solidFill>
-                <a:latin typeface="Calibri" pitchFamily="34" charset="0"/>
-                <a:ea typeface="Calibri" pitchFamily="34" charset="-122"/>
-                <a:cs typeface="Calibri" pitchFamily="34" charset="-120"/>
-              </a:rPr>
-              <a:t>Privacy</a:t>
-            </a:r>
-            <a:endParaRPr lang="en-US" sz="900" dirty="0"/>
-          </a:p>
-        </p:txBody>
-      </p:sp>
-      <p:sp>
-        <p:nvSpPr>
-          <p:cNvPr id="20" name="Text 17"/>
-          <p:cNvSpPr/>
-          <p:nvPr/>
-        </p:nvSpPr>
-        <p:spPr>
-          <a:xfrm>
-            <a:off x="777240" y="6245352"/>
-            <a:ext cx="2926080" cy="201168"/>
-          </a:xfrm>
-          <a:prstGeom prst="rect">
-            <a:avLst/>
-          </a:prstGeom>
-          <a:noFill/>
-          <a:ln/>
-        </p:spPr>
-        <p:txBody>
-          <a:bodyPr wrap="square" lIns="0" tIns="0" rIns="0" bIns="0" rtlCol="0" anchor="ctr"/>
-          <a:lstStyle/>
-          <a:p>
-            <a:pPr indent="0" marL="0">
-              <a:buNone/>
-            </a:pPr>
-            <a:r>
-              <a:rPr lang="en-US" sz="1100" dirty="0">
-                <a:solidFill>
-                  <a:srgbClr val="1F2937"/>
-                </a:solidFill>
-                <a:latin typeface="Calibri" pitchFamily="34" charset="0"/>
-                <a:ea typeface="Calibri" pitchFamily="34" charset="-122"/>
-                <a:cs typeface="Calibri" pitchFamily="34" charset="-120"/>
-              </a:rPr>
-              <a:t>Modal boundary on PII · Haiku for 27 CFR public text only</a:t>
-            </a:r>
-            <a:endParaRPr lang="en-US" sz="1100" dirty="0"/>
-          </a:p>
-        </p:txBody>
-      </p:sp>
-      <p:sp>
-        <p:nvSpPr>
-          <p:cNvPr id="21" name="Shape 18"/>
-          <p:cNvSpPr/>
-          <p:nvPr/>
-        </p:nvSpPr>
-        <p:spPr>
-          <a:xfrm>
-            <a:off x="4251960" y="1691640"/>
-            <a:ext cx="3657600" cy="4663440"/>
-          </a:xfrm>
-          <a:prstGeom prst="rect">
-            <a:avLst/>
-          </a:prstGeom>
-          <a:solidFill>
-            <a:srgbClr val="FFFFFF"/>
-          </a:solidFill>
-          <a:ln w="12700">
-            <a:solidFill>
-              <a:srgbClr val="CADCFC"/>
-            </a:solidFill>
-            <a:prstDash val="solid"/>
-          </a:ln>
-          <a:effectLst>
-            <a:outerShdw sx="100000" sy="100000" kx="0" ky="0" algn="bl" rotWithShape="0" blurRad="127000" dist="25400" dir="8100000">
-              <a:srgbClr val="000000">
-                <a:alpha val="6000"/>
-              </a:srgbClr>
-            </a:outerShdw>
-          </a:effectLst>
-        </p:spPr>
-      </p:sp>
-      <p:sp>
-        <p:nvSpPr>
-          <p:cNvPr id="22" name="Shape 19"/>
-          <p:cNvSpPr/>
-          <p:nvPr/>
-        </p:nvSpPr>
-        <p:spPr>
-          <a:xfrm>
-            <a:off x="4251960" y="1691640"/>
-            <a:ext cx="3657600" cy="109728"/>
-          </a:xfrm>
-          <a:prstGeom prst="rect">
-            <a:avLst/>
-          </a:prstGeom>
-          <a:solidFill>
-            <a:srgbClr val="1E2761"/>
-          </a:solidFill>
-          <a:ln w="12700">
-            <a:solidFill>
-              <a:srgbClr val="333333"/>
-            </a:solidFill>
-            <a:prstDash val="solid"/>
-          </a:ln>
-        </p:spPr>
-      </p:sp>
-      <p:sp>
-        <p:nvSpPr>
-          <p:cNvPr id="23" name="Text 20"/>
-          <p:cNvSpPr/>
-          <p:nvPr/>
-        </p:nvSpPr>
-        <p:spPr>
-          <a:xfrm>
-            <a:off x="4617720" y="1965960"/>
-            <a:ext cx="822960" cy="914400"/>
-          </a:xfrm>
-          <a:prstGeom prst="rect">
-            <a:avLst/>
-          </a:prstGeom>
-          <a:noFill/>
-          <a:ln/>
-        </p:spPr>
-        <p:txBody>
-          <a:bodyPr wrap="square" lIns="0" tIns="0" rIns="0" bIns="0" rtlCol="0" anchor="ctr"/>
-          <a:lstStyle/>
-          <a:p>
-            <a:pPr indent="0" marL="0">
-              <a:buNone/>
-            </a:pPr>
-            <a:r>
-              <a:rPr lang="en-US" sz="7200" b="1" dirty="0">
-                <a:solidFill>
-                  <a:srgbClr val="1E2761"/>
-                </a:solidFill>
-                <a:latin typeface="Georgia" pitchFamily="34" charset="0"/>
-                <a:ea typeface="Georgia" pitchFamily="34" charset="-122"/>
-                <a:cs typeface="Georgia" pitchFamily="34" charset="-120"/>
-              </a:rPr>
-              <a:t>B</a:t>
-            </a:r>
-            <a:endParaRPr lang="en-US" sz="7200" dirty="0"/>
-          </a:p>
-        </p:txBody>
-      </p:sp>
-      <p:pic>
-        <p:nvPicPr>
-          <p:cNvPr id="24" name="Image 1" descr="preencoded.png">    </p:cNvPr>
-          <p:cNvPicPr>
-            <a:picLocks noChangeAspect="1"/>
-          </p:cNvPicPr>
-          <p:nvPr/>
-        </p:nvPicPr>
-        <p:blipFill>
-          <a:blip r:embed="rId2"/>
-          <a:stretch>
-            <a:fillRect/>
-          </a:stretch>
-        </p:blipFill>
-        <p:spPr>
-          <a:xfrm>
-            <a:off x="7040880" y="2103120"/>
-            <a:ext cx="502920" cy="502920"/>
-          </a:xfrm>
-          <a:prstGeom prst="rect">
-            <a:avLst/>
-          </a:prstGeom>
-        </p:spPr>
-      </p:pic>
-      <p:sp>
-        <p:nvSpPr>
-          <p:cNvPr id="25" name="Text 21"/>
-          <p:cNvSpPr/>
-          <p:nvPr/>
-        </p:nvSpPr>
-        <p:spPr>
-          <a:xfrm>
-            <a:off x="4617720" y="2971800"/>
-            <a:ext cx="2926080" cy="457200"/>
-          </a:xfrm>
-          <a:prstGeom prst="rect">
-            <a:avLst/>
-          </a:prstGeom>
-          <a:noFill/>
-          <a:ln/>
-        </p:spPr>
-        <p:txBody>
-          <a:bodyPr wrap="square" lIns="0" tIns="0" rIns="0" bIns="0" rtlCol="0" anchor="ctr"/>
-          <a:lstStyle/>
-          <a:p>
-            <a:pPr indent="0" marL="0">
-              <a:buNone/>
-            </a:pPr>
-            <a:r>
-              <a:rPr lang="en-US" sz="2200" b="1" dirty="0">
-                <a:solidFill>
-                  <a:srgbClr val="1E2761"/>
-                </a:solidFill>
-                <a:latin typeface="Georgia" pitchFamily="34" charset="0"/>
-                <a:ea typeface="Georgia" pitchFamily="34" charset="-122"/>
-                <a:cs typeface="Georgia" pitchFamily="34" charset="-120"/>
-              </a:rPr>
-              <a:t>Privacy-only (no commodity model)</a:t>
-            </a:r>
-            <a:endParaRPr lang="en-US" sz="2200" dirty="0"/>
-          </a:p>
-        </p:txBody>
-      </p:sp>
-      <p:sp>
-        <p:nvSpPr>
-          <p:cNvPr id="26" name="Text 22"/>
-          <p:cNvSpPr/>
-          <p:nvPr/>
-        </p:nvSpPr>
-        <p:spPr>
-          <a:xfrm>
-            <a:off x="4617720" y="3429000"/>
-            <a:ext cx="2926080" cy="320040"/>
-          </a:xfrm>
-          <a:prstGeom prst="rect">
-            <a:avLst/>
-          </a:prstGeom>
-          <a:noFill/>
-          <a:ln/>
-        </p:spPr>
-        <p:txBody>
-          <a:bodyPr wrap="square" lIns="0" tIns="0" rIns="0" bIns="0" rtlCol="0" anchor="ctr"/>
-          <a:lstStyle/>
-          <a:p>
-            <a:pPr indent="0" marL="0">
-              <a:buNone/>
-            </a:pPr>
-            <a:r>
-              <a:rPr lang="en-US" sz="1100" b="1" spc="300" kern="0" dirty="0">
-                <a:solidFill>
-                  <a:srgbClr val="6B7280"/>
-                </a:solidFill>
-                <a:latin typeface="Calibri" pitchFamily="34" charset="0"/>
-                <a:ea typeface="Calibri" pitchFamily="34" charset="-122"/>
-                <a:cs typeface="Calibri" pitchFamily="34" charset="-120"/>
-              </a:rPr>
-              <a:t>Modal Qwen v2 only · Tesseract for warning</a:t>
-            </a:r>
-            <a:endParaRPr lang="en-US" sz="1100" dirty="0"/>
-          </a:p>
-        </p:txBody>
-      </p:sp>
-      <p:sp>
-        <p:nvSpPr>
-          <p:cNvPr id="27" name="Text 23"/>
-          <p:cNvSpPr/>
-          <p:nvPr/>
-        </p:nvSpPr>
-        <p:spPr>
-          <a:xfrm>
-            <a:off x="4617720" y="3840480"/>
-            <a:ext cx="2926080" cy="1645920"/>
-          </a:xfrm>
-          <a:prstGeom prst="rect">
-            <a:avLst/>
-          </a:prstGeom>
-          <a:noFill/>
-          <a:ln/>
-        </p:spPr>
-        <p:txBody>
-          <a:bodyPr wrap="square" lIns="0" tIns="0" rIns="0" bIns="0" rtlCol="0" anchor="ctr"/>
-          <a:lstStyle/>
-          <a:p>
-            <a:pPr indent="0" marL="0">
-              <a:buNone/>
-            </a:pPr>
-            <a:r>
-              <a:rPr lang="en-US" sz="1200" dirty="0">
-                <a:solidFill>
-                  <a:srgbClr val="1F2937"/>
-                </a:solidFill>
-                <a:latin typeface="Calibri" pitchFamily="34" charset="0"/>
-                <a:ea typeface="Calibri" pitchFamily="34" charset="-122"/>
-                <a:cs typeface="Calibri" pitchFamily="34" charset="-120"/>
-              </a:rPr>
-              <a:t>Same React + FastAPI. Modal Qwen v2 + Modal Tesseract container handle every field — Haiku is removed entirely. Government Warning verbatim falls back to Tesseract regex. Use when no third-party API is acceptable in the data path.</a:t>
-            </a:r>
-            <a:endParaRPr lang="en-US" sz="1200" dirty="0"/>
-          </a:p>
-        </p:txBody>
-      </p:sp>
-      <p:sp>
-        <p:nvSpPr>
-          <p:cNvPr id="28" name="Shape 24"/>
-          <p:cNvSpPr/>
-          <p:nvPr/>
-        </p:nvSpPr>
-        <p:spPr>
-          <a:xfrm>
-            <a:off x="4617720" y="5577840"/>
-            <a:ext cx="2926080" cy="18288"/>
-          </a:xfrm>
-          <a:prstGeom prst="rect">
-            <a:avLst/>
-          </a:prstGeom>
-          <a:solidFill>
-            <a:srgbClr val="CADCFC"/>
-          </a:solidFill>
-          <a:ln w="12700">
-            <a:solidFill>
-              <a:srgbClr val="333333"/>
-            </a:solidFill>
-            <a:prstDash val="solid"/>
-          </a:ln>
-        </p:spPr>
-      </p:sp>
-      <p:sp>
-        <p:nvSpPr>
-          <p:cNvPr id="29" name="Text 25"/>
-          <p:cNvSpPr/>
-          <p:nvPr/>
-        </p:nvSpPr>
-        <p:spPr>
-          <a:xfrm>
-            <a:off x="4617720" y="5669280"/>
-            <a:ext cx="2926080" cy="201168"/>
-          </a:xfrm>
-          <a:prstGeom prst="rect">
-            <a:avLst/>
-          </a:prstGeom>
-          <a:noFill/>
-          <a:ln/>
-        </p:spPr>
-        <p:txBody>
-          <a:bodyPr wrap="square" lIns="0" tIns="0" rIns="0" bIns="0" rtlCol="0" anchor="ctr"/>
-          <a:lstStyle/>
-          <a:p>
-            <a:pPr indent="0" marL="0">
-              <a:buNone/>
-            </a:pPr>
-            <a:r>
-              <a:rPr lang="en-US" sz="900" b="1" spc="300" kern="0" dirty="0">
-                <a:solidFill>
-                  <a:srgbClr val="6B7280"/>
-                </a:solidFill>
-                <a:latin typeface="Calibri" pitchFamily="34" charset="0"/>
-                <a:ea typeface="Calibri" pitchFamily="34" charset="-122"/>
-                <a:cs typeface="Calibri" pitchFamily="34" charset="-120"/>
-              </a:rPr>
-              <a:t>Cost</a:t>
-            </a:r>
-            <a:endParaRPr lang="en-US" sz="900" dirty="0"/>
-          </a:p>
-        </p:txBody>
-      </p:sp>
-      <p:sp>
-        <p:nvSpPr>
-          <p:cNvPr id="30" name="Text 26"/>
-          <p:cNvSpPr/>
-          <p:nvPr/>
-        </p:nvSpPr>
-        <p:spPr>
-          <a:xfrm>
-            <a:off x="4617720" y="5852160"/>
-            <a:ext cx="2926080" cy="201168"/>
-          </a:xfrm>
-          <a:prstGeom prst="rect">
-            <a:avLst/>
-          </a:prstGeom>
-          <a:noFill/>
-          <a:ln/>
-        </p:spPr>
-        <p:txBody>
-          <a:bodyPr wrap="square" lIns="0" tIns="0" rIns="0" bIns="0" rtlCol="0" anchor="ctr"/>
-          <a:lstStyle/>
-          <a:p>
-            <a:pPr indent="0" marL="0">
-              <a:buNone/>
-            </a:pPr>
-            <a:r>
-              <a:rPr lang="en-US" sz="1100" dirty="0">
-                <a:solidFill>
-                  <a:srgbClr val="1F2937"/>
-                </a:solidFill>
-                <a:latin typeface="Calibri" pitchFamily="34" charset="0"/>
-                <a:ea typeface="Calibri" pitchFamily="34" charset="-122"/>
-                <a:cs typeface="Calibri" pitchFamily="34" charset="-120"/>
-              </a:rPr>
-              <a:t>$0/hr idle · $0.001/req active</a:t>
-            </a:r>
-            <a:endParaRPr lang="en-US" sz="1100" dirty="0"/>
-          </a:p>
-        </p:txBody>
-      </p:sp>
-      <p:sp>
-        <p:nvSpPr>
-          <p:cNvPr id="31" name="Text 27"/>
-          <p:cNvSpPr/>
-          <p:nvPr/>
-        </p:nvSpPr>
-        <p:spPr>
-          <a:xfrm>
-            <a:off x="4617720" y="6062472"/>
-            <a:ext cx="2926080" cy="201168"/>
-          </a:xfrm>
-          <a:prstGeom prst="rect">
-            <a:avLst/>
-          </a:prstGeom>
-          <a:noFill/>
-          <a:ln/>
-        </p:spPr>
-        <p:txBody>
-          <a:bodyPr wrap="square" lIns="0" tIns="0" rIns="0" bIns="0" rtlCol="0" anchor="ctr"/>
-          <a:lstStyle/>
-          <a:p>
-            <a:pPr indent="0" marL="0">
-              <a:buNone/>
-            </a:pPr>
-            <a:r>
-              <a:rPr lang="en-US" sz="900" b="1" spc="300" kern="0" dirty="0">
-                <a:solidFill>
-                  <a:srgbClr val="6B7280"/>
-                </a:solidFill>
-                <a:latin typeface="Calibri" pitchFamily="34" charset="0"/>
-                <a:ea typeface="Calibri" pitchFamily="34" charset="-122"/>
-                <a:cs typeface="Calibri" pitchFamily="34" charset="-120"/>
-              </a:rPr>
-              <a:t>Privacy</a:t>
-            </a:r>
-            <a:endParaRPr lang="en-US" sz="900" dirty="0"/>
-          </a:p>
-        </p:txBody>
-      </p:sp>
-      <p:sp>
-        <p:nvSpPr>
-          <p:cNvPr id="32" name="Text 28"/>
-          <p:cNvSpPr/>
-          <p:nvPr/>
-        </p:nvSpPr>
-        <p:spPr>
-          <a:xfrm>
-            <a:off x="4617720" y="6245352"/>
-            <a:ext cx="2926080" cy="201168"/>
-          </a:xfrm>
-          <a:prstGeom prst="rect">
-            <a:avLst/>
-          </a:prstGeom>
-          <a:noFill/>
-          <a:ln/>
-        </p:spPr>
-        <p:txBody>
-          <a:bodyPr wrap="square" lIns="0" tIns="0" rIns="0" bIns="0" rtlCol="0" anchor="ctr"/>
-          <a:lstStyle/>
-          <a:p>
-            <a:pPr indent="0" marL="0">
-              <a:buNone/>
-            </a:pPr>
-            <a:r>
-              <a:rPr lang="en-US" sz="1100" dirty="0">
-                <a:solidFill>
-                  <a:srgbClr val="1F2937"/>
-                </a:solidFill>
-                <a:latin typeface="Calibri" pitchFamily="34" charset="0"/>
-                <a:ea typeface="Calibri" pitchFamily="34" charset="-122"/>
-                <a:cs typeface="Calibri" pitchFamily="34" charset="-120"/>
-              </a:rPr>
-              <a:t>Zero third-party API · single provider</a:t>
-            </a:r>
-            <a:endParaRPr lang="en-US" sz="1100" dirty="0"/>
-          </a:p>
-        </p:txBody>
-      </p:sp>
-      <p:sp>
-        <p:nvSpPr>
-          <p:cNvPr id="33" name="Shape 29"/>
-          <p:cNvSpPr/>
-          <p:nvPr/>
-        </p:nvSpPr>
-        <p:spPr>
-          <a:xfrm>
-            <a:off x="8092440" y="1691640"/>
-            <a:ext cx="3657600" cy="4663440"/>
-          </a:xfrm>
-          <a:prstGeom prst="rect">
-            <a:avLst/>
-          </a:prstGeom>
-          <a:solidFill>
-            <a:srgbClr val="FFFFFF"/>
-          </a:solidFill>
-          <a:ln w="12700">
-            <a:solidFill>
-              <a:srgbClr val="CADCFC"/>
-            </a:solidFill>
-            <a:prstDash val="solid"/>
-          </a:ln>
-          <a:effectLst>
-            <a:outerShdw sx="100000" sy="100000" kx="0" ky="0" algn="bl" rotWithShape="0" blurRad="127000" dist="25400" dir="8100000">
-              <a:srgbClr val="000000">
-                <a:alpha val="6000"/>
-              </a:srgbClr>
-            </a:outerShdw>
-          </a:effectLst>
-        </p:spPr>
-      </p:sp>
-      <p:sp>
-        <p:nvSpPr>
-          <p:cNvPr id="34" name="Shape 30"/>
-          <p:cNvSpPr/>
-          <p:nvPr/>
-        </p:nvSpPr>
-        <p:spPr>
-          <a:xfrm>
-            <a:off x="8092440" y="1691640"/>
-            <a:ext cx="3657600" cy="109728"/>
-          </a:xfrm>
-          <a:prstGeom prst="rect">
-            <a:avLst/>
-          </a:prstGeom>
-          <a:solidFill>
-            <a:srgbClr val="1E2761"/>
-          </a:solidFill>
-          <a:ln w="12700">
-            <a:solidFill>
-              <a:srgbClr val="333333"/>
-            </a:solidFill>
-            <a:prstDash val="solid"/>
-          </a:ln>
-        </p:spPr>
-      </p:sp>
-      <p:sp>
-        <p:nvSpPr>
-          <p:cNvPr id="35" name="Text 31"/>
-          <p:cNvSpPr/>
-          <p:nvPr/>
-        </p:nvSpPr>
-        <p:spPr>
-          <a:xfrm>
-            <a:off x="8458200" y="1965960"/>
-            <a:ext cx="822960" cy="914400"/>
-          </a:xfrm>
-          <a:prstGeom prst="rect">
-            <a:avLst/>
-          </a:prstGeom>
-          <a:noFill/>
-          <a:ln/>
-        </p:spPr>
-        <p:txBody>
-          <a:bodyPr wrap="square" lIns="0" tIns="0" rIns="0" bIns="0" rtlCol="0" anchor="ctr"/>
-          <a:lstStyle/>
-          <a:p>
-            <a:pPr indent="0" marL="0">
-              <a:buNone/>
-            </a:pPr>
-            <a:r>
-              <a:rPr lang="en-US" sz="7200" b="1" dirty="0">
-                <a:solidFill>
-                  <a:srgbClr val="1E2761"/>
-                </a:solidFill>
-                <a:latin typeface="Georgia" pitchFamily="34" charset="0"/>
-                <a:ea typeface="Georgia" pitchFamily="34" charset="-122"/>
-                <a:cs typeface="Georgia" pitchFamily="34" charset="-120"/>
-              </a:rPr>
-              <a:t>C</a:t>
-            </a:r>
-            <a:endParaRPr lang="en-US" sz="7200" dirty="0"/>
-          </a:p>
-        </p:txBody>
-      </p:sp>
-      <p:pic>
-        <p:nvPicPr>
-          <p:cNvPr id="36" name="Image 2" descr="preencoded.png">    </p:cNvPr>
-          <p:cNvPicPr>
-            <a:picLocks noChangeAspect="1"/>
-          </p:cNvPicPr>
-          <p:nvPr/>
-        </p:nvPicPr>
-        <p:blipFill>
-          <a:blip r:embed="rId3"/>
-          <a:stretch>
-            <a:fillRect/>
-          </a:stretch>
-        </p:blipFill>
-        <p:spPr>
-          <a:xfrm>
-            <a:off x="10881360" y="2103120"/>
-            <a:ext cx="502920" cy="502920"/>
-          </a:xfrm>
-          <a:prstGeom prst="rect">
-            <a:avLst/>
-          </a:prstGeom>
-        </p:spPr>
-      </p:pic>
-      <p:sp>
-        <p:nvSpPr>
-          <p:cNvPr id="37" name="Text 32"/>
-          <p:cNvSpPr/>
-          <p:nvPr/>
-        </p:nvSpPr>
-        <p:spPr>
-          <a:xfrm>
-            <a:off x="8458200" y="2971800"/>
-            <a:ext cx="2926080" cy="457200"/>
-          </a:xfrm>
-          <a:prstGeom prst="rect">
-            <a:avLst/>
-          </a:prstGeom>
-          <a:noFill/>
-          <a:ln/>
-        </p:spPr>
-        <p:txBody>
-          <a:bodyPr wrap="square" lIns="0" tIns="0" rIns="0" bIns="0" rtlCol="0" anchor="ctr"/>
-          <a:lstStyle/>
-          <a:p>
-            <a:pPr indent="0" marL="0">
-              <a:buNone/>
-            </a:pPr>
-            <a:r>
-              <a:rPr lang="en-US" sz="2200" b="1" dirty="0">
-                <a:solidFill>
-                  <a:srgbClr val="1E2761"/>
-                </a:solidFill>
-                <a:latin typeface="Georgia" pitchFamily="34" charset="0"/>
-                <a:ea typeface="Georgia" pitchFamily="34" charset="-122"/>
-                <a:cs typeface="Georgia" pitchFamily="34" charset="-120"/>
-              </a:rPr>
-              <a:t>Agency-hosted</a:t>
-            </a:r>
-            <a:endParaRPr lang="en-US" sz="2200" dirty="0"/>
-          </a:p>
-        </p:txBody>
-      </p:sp>
-      <p:sp>
-        <p:nvSpPr>
-          <p:cNvPr id="38" name="Text 33"/>
-          <p:cNvSpPr/>
-          <p:nvPr/>
-        </p:nvSpPr>
-        <p:spPr>
-          <a:xfrm>
-            <a:off x="8458200" y="3429000"/>
-            <a:ext cx="2926080" cy="320040"/>
-          </a:xfrm>
-          <a:prstGeom prst="rect">
-            <a:avLst/>
-          </a:prstGeom>
-          <a:noFill/>
-          <a:ln/>
-        </p:spPr>
-        <p:txBody>
-          <a:bodyPr wrap="square" lIns="0" tIns="0" rIns="0" bIns="0" rtlCol="0" anchor="ctr"/>
-          <a:lstStyle/>
-          <a:p>
-            <a:pPr indent="0" marL="0">
-              <a:buNone/>
-            </a:pPr>
-            <a:r>
-              <a:rPr lang="en-US" sz="1100" b="1" spc="300" kern="0" dirty="0">
-                <a:solidFill>
-                  <a:srgbClr val="6B7280"/>
-                </a:solidFill>
-                <a:latin typeface="Calibri" pitchFamily="34" charset="0"/>
-                <a:ea typeface="Calibri" pitchFamily="34" charset="-122"/>
-                <a:cs typeface="Calibri" pitchFamily="34" charset="-120"/>
-              </a:rPr>
-              <a:t>Azure Gov / Azure ML · on-prem GPU</a:t>
-            </a:r>
-            <a:endParaRPr lang="en-US" sz="1100" dirty="0"/>
-          </a:p>
-        </p:txBody>
-      </p:sp>
-      <p:sp>
-        <p:nvSpPr>
-          <p:cNvPr id="39" name="Text 34"/>
-          <p:cNvSpPr/>
-          <p:nvPr/>
-        </p:nvSpPr>
-        <p:spPr>
-          <a:xfrm>
-            <a:off x="8458200" y="3840480"/>
-            <a:ext cx="2926080" cy="1645920"/>
-          </a:xfrm>
-          <a:prstGeom prst="rect">
-            <a:avLst/>
-          </a:prstGeom>
-          <a:noFill/>
-          <a:ln/>
-        </p:spPr>
-        <p:txBody>
-          <a:bodyPr wrap="square" lIns="0" tIns="0" rIns="0" bIns="0" rtlCol="0" anchor="ctr"/>
-          <a:lstStyle/>
-          <a:p>
-            <a:pPr indent="0" marL="0">
-              <a:buNone/>
-            </a:pPr>
-            <a:r>
-              <a:rPr lang="en-US" sz="1200" dirty="0">
-                <a:solidFill>
-                  <a:srgbClr val="1F2937"/>
-                </a:solidFill>
-                <a:latin typeface="Calibri" pitchFamily="34" charset="0"/>
-                <a:ea typeface="Calibri" pitchFamily="34" charset="-122"/>
-                <a:cs typeface="Calibri" pitchFamily="34" charset="-120"/>
-              </a:rPr>
-              <a:t>Same Docker image inside FedRAMP boundary. INFERENCE_MODE=sft loads the LoRA on agency GPU. Zero outbound calls. Rules engine identical. Production target.</a:t>
-            </a:r>
-            <a:endParaRPr lang="en-US" sz="1200" dirty="0"/>
-          </a:p>
-        </p:txBody>
-      </p:sp>
-      <p:sp>
-        <p:nvSpPr>
-          <p:cNvPr id="40" name="Shape 35"/>
-          <p:cNvSpPr/>
-          <p:nvPr/>
-        </p:nvSpPr>
-        <p:spPr>
-          <a:xfrm>
-            <a:off x="8458200" y="5577840"/>
-            <a:ext cx="2926080" cy="18288"/>
-          </a:xfrm>
-          <a:prstGeom prst="rect">
-            <a:avLst/>
-          </a:prstGeom>
-          <a:solidFill>
-            <a:srgbClr val="CADCFC"/>
-          </a:solidFill>
-          <a:ln w="12700">
-            <a:solidFill>
-              <a:srgbClr val="333333"/>
-            </a:solidFill>
-            <a:prstDash val="solid"/>
-          </a:ln>
-        </p:spPr>
-      </p:sp>
-      <p:sp>
-        <p:nvSpPr>
-          <p:cNvPr id="41" name="Text 36"/>
-          <p:cNvSpPr/>
-          <p:nvPr/>
-        </p:nvSpPr>
-        <p:spPr>
-          <a:xfrm>
-            <a:off x="8458200" y="5669280"/>
-            <a:ext cx="2926080" cy="201168"/>
-          </a:xfrm>
-          <a:prstGeom prst="rect">
-            <a:avLst/>
-          </a:prstGeom>
-          <a:noFill/>
-          <a:ln/>
-        </p:spPr>
-        <p:txBody>
-          <a:bodyPr wrap="square" lIns="0" tIns="0" rIns="0" bIns="0" rtlCol="0" anchor="ctr"/>
-          <a:lstStyle/>
-          <a:p>
-            <a:pPr indent="0" marL="0">
-              <a:buNone/>
-            </a:pPr>
-            <a:r>
-              <a:rPr lang="en-US" sz="900" b="1" spc="300" kern="0" dirty="0">
-                <a:solidFill>
-                  <a:srgbClr val="6B7280"/>
-                </a:solidFill>
-                <a:latin typeface="Calibri" pitchFamily="34" charset="0"/>
-                <a:ea typeface="Calibri" pitchFamily="34" charset="-122"/>
-                <a:cs typeface="Calibri" pitchFamily="34" charset="-120"/>
-              </a:rPr>
-              <a:t>Cost</a:t>
-            </a:r>
-            <a:endParaRPr lang="en-US" sz="900" dirty="0"/>
-          </a:p>
-        </p:txBody>
-      </p:sp>
-      <p:sp>
-        <p:nvSpPr>
-          <p:cNvPr id="42" name="Text 37"/>
-          <p:cNvSpPr/>
-          <p:nvPr/>
-        </p:nvSpPr>
-        <p:spPr>
-          <a:xfrm>
-            <a:off x="8458200" y="5852160"/>
-            <a:ext cx="2926080" cy="201168"/>
-          </a:xfrm>
-          <a:prstGeom prst="rect">
-            <a:avLst/>
-          </a:prstGeom>
-          <a:noFill/>
-          <a:ln/>
-        </p:spPr>
-        <p:txBody>
-          <a:bodyPr wrap="square" lIns="0" tIns="0" rIns="0" bIns="0" rtlCol="0" anchor="ctr"/>
-          <a:lstStyle/>
-          <a:p>
-            <a:pPr indent="0" marL="0">
-              <a:buNone/>
-            </a:pPr>
-            <a:r>
-              <a:rPr lang="en-US" sz="1100" dirty="0">
-                <a:solidFill>
-                  <a:srgbClr val="1F2937"/>
-                </a:solidFill>
-                <a:latin typeface="Calibri" pitchFamily="34" charset="0"/>
-                <a:ea typeface="Calibri" pitchFamily="34" charset="-122"/>
-                <a:cs typeface="Calibri" pitchFamily="34" charset="-120"/>
-              </a:rPr>
-              <a:t>Inside agency Azure spend</a:t>
-            </a:r>
-            <a:endParaRPr lang="en-US" sz="1100" dirty="0"/>
-          </a:p>
-        </p:txBody>
-      </p:sp>
-      <p:sp>
-        <p:nvSpPr>
-          <p:cNvPr id="43" name="Text 38"/>
-          <p:cNvSpPr/>
-          <p:nvPr/>
-        </p:nvSpPr>
-        <p:spPr>
-          <a:xfrm>
-            <a:off x="8458200" y="6062472"/>
-            <a:ext cx="2926080" cy="201168"/>
-          </a:xfrm>
-          <a:prstGeom prst="rect">
-            <a:avLst/>
-          </a:prstGeom>
-          <a:noFill/>
-          <a:ln/>
-        </p:spPr>
-        <p:txBody>
-          <a:bodyPr wrap="square" lIns="0" tIns="0" rIns="0" bIns="0" rtlCol="0" anchor="ctr"/>
-          <a:lstStyle/>
-          <a:p>
-            <a:pPr indent="0" marL="0">
-              <a:buNone/>
-            </a:pPr>
-            <a:r>
-              <a:rPr lang="en-US" sz="900" b="1" spc="300" kern="0" dirty="0">
-                <a:solidFill>
-                  <a:srgbClr val="6B7280"/>
-                </a:solidFill>
-                <a:latin typeface="Calibri" pitchFamily="34" charset="0"/>
-                <a:ea typeface="Calibri" pitchFamily="34" charset="-122"/>
-                <a:cs typeface="Calibri" pitchFamily="34" charset="-120"/>
-              </a:rPr>
-              <a:t>Privacy</a:t>
-            </a:r>
-            <a:endParaRPr lang="en-US" sz="900" dirty="0"/>
-          </a:p>
-        </p:txBody>
-      </p:sp>
-      <p:sp>
-        <p:nvSpPr>
-          <p:cNvPr id="44" name="Text 39"/>
-          <p:cNvSpPr/>
-          <p:nvPr/>
-        </p:nvSpPr>
-        <p:spPr>
-          <a:xfrm>
-            <a:off x="8458200" y="6245352"/>
-            <a:ext cx="2926080" cy="201168"/>
-          </a:xfrm>
-          <a:prstGeom prst="rect">
-            <a:avLst/>
-          </a:prstGeom>
-          <a:noFill/>
-          <a:ln/>
-        </p:spPr>
-        <p:txBody>
-          <a:bodyPr wrap="square" lIns="0" tIns="0" rIns="0" bIns="0" rtlCol="0" anchor="ctr"/>
-          <a:lstStyle/>
-          <a:p>
-            <a:pPr indent="0" marL="0">
-              <a:buNone/>
-            </a:pPr>
-            <a:r>
-              <a:rPr lang="en-US" sz="1100" dirty="0">
-                <a:solidFill>
-                  <a:srgbClr val="1F2937"/>
-                </a:solidFill>
-                <a:latin typeface="Calibri" pitchFamily="34" charset="0"/>
-                <a:ea typeface="Calibri" pitchFamily="34" charset="-122"/>
-                <a:cs typeface="Calibri" pitchFamily="34" charset="-120"/>
-              </a:rPr>
-              <a:t>FedRAMP High · IL4/5</a:t>
-            </a:r>
-            <a:endParaRPr lang="en-US" sz="1100" dirty="0"/>
-          </a:p>
-        </p:txBody>
-      </p:sp>
-      <p:sp>
-        <p:nvSpPr>
-          <p:cNvPr id="45" name="Text 40"/>
-          <p:cNvSpPr/>
-          <p:nvPr/>
-        </p:nvSpPr>
-        <p:spPr>
-          <a:xfrm>
-            <a:off x="502920" y="6446520"/>
-            <a:ext cx="11247120" cy="320040"/>
-          </a:xfrm>
-          <a:prstGeom prst="rect">
-            <a:avLst/>
-          </a:prstGeom>
-          <a:noFill/>
-          <a:ln/>
-        </p:spPr>
-        <p:txBody>
-          <a:bodyPr wrap="square" lIns="0" tIns="0" rIns="0" bIns="0" rtlCol="0" anchor="ctr"/>
-          <a:lstStyle/>
-          <a:p>
-            <a:pPr algn="ctr" indent="0" marL="0">
-              <a:buNone/>
-            </a:pPr>
-            <a:r>
-              <a:rPr lang="en-US" sz="1200" i="1" dirty="0">
-                <a:solidFill>
-                  <a:srgbClr val="6B7280"/>
-                </a:solidFill>
-                <a:latin typeface="Georgia" pitchFamily="34" charset="0"/>
-                <a:ea typeface="Georgia" pitchFamily="34" charset="-122"/>
-                <a:cs typeface="Georgia" pitchFamily="34" charset="-120"/>
-              </a:rPr>
-              <a:t>Swapping topology is one env var. The verifier code never changes.</a:t>
-            </a:r>
-            <a:endParaRPr lang="en-US" sz="1200" dirty="0"/>
           </a:p>
         </p:txBody>
       </p:sp>
